--- a/lecons/F3/18_FORM4_LESSON15_Weathering.pptx
+++ b/lecons/F3/18_FORM4_LESSON15_Weathering.pptx
@@ -49,9 +49,11 @@
     <p:sldId id="297" r:id="rId43"/>
     <p:sldId id="298" r:id="rId44"/>
     <p:sldId id="299" r:id="rId45"/>
+    <p:sldId id="300" r:id="rId46"/>
+    <p:sldId id="301" r:id="rId47"/>
   </p:sldIdLst>
   <p:notesMasterIdLst>
-    <p:notesMasterId r:id="rId46"/>
+    <p:notesMasterId r:id="rId48"/>
   </p:notesMasterIdLst>
   <p:sldSz cx="12192000" cy="6858000"/>
   <p:notesSz cx="6858000" cy="12192000"/>
@@ -721,7 +723,7 @@
           <a:p>
             <a:r>
               <a:rPr lang="en-US" dirty="0"/>
-              <a:t>Good. The old wall breaks into pieces.</a:t>
+              <a:t>Good. Sadou does not know what breaks the stones of the old wall and why.</a:t>
             </a:r>
             <a:endParaRPr lang="en-US" dirty="0"/>
           </a:p>
@@ -809,7 +811,7 @@
           <a:p>
             <a:r>
               <a:rPr lang="en-US" dirty="0"/>
-              <a:t>Question 2: Why is the old wall weaker than the new one? Think for a moment, then raise your hand to answer.</a:t>
+              <a:t>Question 2: What happens to the stones of the old wall? Think for a moment, then raise your hand to answer.</a:t>
             </a:r>
             <a:endParaRPr lang="en-US" dirty="0"/>
           </a:p>
@@ -897,7 +899,7 @@
           <a:p>
             <a:r>
               <a:rPr lang="en-US" dirty="0"/>
-              <a:t>Good. It has been in the sun and rain for many years.</a:t>
+              <a:t>Good. They crack and break into sandy pieces.</a:t>
             </a:r>
             <a:endParaRPr lang="en-US" dirty="0"/>
           </a:p>
@@ -985,7 +987,7 @@
           <a:p>
             <a:r>
               <a:rPr lang="en-US" dirty="0"/>
-              <a:t>Question 3: What do we call this slow breaking of rock? Think for a moment, then raise your hand to answer.</a:t>
+              <a:t>Question 3: Why is the new wall still strong? Think for a moment, then raise your hand to answer.</a:t>
             </a:r>
             <a:endParaRPr lang="en-US" dirty="0"/>
           </a:p>
@@ -1073,7 +1075,7 @@
           <a:p>
             <a:r>
               <a:rPr lang="en-US" dirty="0"/>
-              <a:t>Good. Weathering.</a:t>
+              <a:t>Good. It has not yet been exposed to the weather for a long time.</a:t>
             </a:r>
             <a:endParaRPr lang="en-US" dirty="0"/>
           </a:p>
@@ -1337,7 +1339,7 @@
           <a:p>
             <a:r>
               <a:rPr lang="en-US" dirty="0"/>
-              <a:t>Activity 1. Look carefully at this picture: an old wall that is breaking. Observe every detail before I ask the question.</a:t>
+              <a:t>Activity 1. Look carefully at this picture: an old wall. Observe every detail before I ask the question.</a:t>
             </a:r>
             <a:endParaRPr lang="en-US" dirty="0"/>
           </a:p>
@@ -1601,7 +1603,7 @@
           <a:p>
             <a:r>
               <a:rPr lang="en-US" dirty="0"/>
-              <a:t>Let us check the answer together. Sun, rain and air: weathering.</a:t>
+              <a:t>Let us check the answer together. Sun, rain, air and plants: this is weathering.</a:t>
             </a:r>
             <a:endParaRPr lang="en-US" dirty="0"/>
           </a:p>
@@ -1689,7 +1691,7 @@
           <a:p>
             <a:r>
               <a:rPr lang="en-US" dirty="0"/>
-              <a:t>Activity 2. Look carefully at this picture: a rusty piece of metal. Observe every detail before I ask the question.</a:t>
+              <a:t>Activity 2. Look carefully at this picture: rusty iron. Observe every detail before I ask the question.</a:t>
             </a:r>
             <a:endParaRPr lang="en-US" dirty="0"/>
           </a:p>
@@ -1777,7 +1779,7 @@
           <a:p>
             <a:r>
               <a:rPr lang="en-US" dirty="0"/>
-              <a:t>Here is the question for Activity 2: Rain and air make iron red and weak. Which type of weathering is similar? Take one minute to think and write your answer in your rough notebook.</a:t>
+              <a:t>Here is the question for Activity 2: Rain and air change iron into red, weak rust. Which type of weathering changes rocks in the same way? Take one minute to think and write your answer in your rough notebook.</a:t>
             </a:r>
             <a:endParaRPr lang="en-US" dirty="0"/>
           </a:p>
@@ -1953,7 +1955,7 @@
           <a:p>
             <a:r>
               <a:rPr lang="en-US" dirty="0"/>
-              <a:t>Activity 3. Look carefully at this picture: tree roots break a rock. Observe every detail before I ask the question.</a:t>
+              <a:t>Activity 3. Look carefully at this picture: roots in a rock. Observe every detail before I ask the question.</a:t>
             </a:r>
             <a:endParaRPr lang="en-US" dirty="0"/>
           </a:p>
@@ -2305,7 +2307,7 @@
           <a:p>
             <a:r>
               <a:rPr lang="en-US" dirty="0"/>
-              <a:t>Let us copy Meaning of Weathering. Weathering is defined as follows. On this slide we have Weathering. Write each point on a new line, with the key term first, and explain it in your own words when we revise.</a:t>
+              <a:t>Let us copy the definitions. The key terms of this lesson are defined as follows. On this slide we have Weathering. Write each point on a new line, with the key term first, and explain it in your own words when we revise.</a:t>
             </a:r>
             <a:endParaRPr lang="en-US" dirty="0"/>
           </a:p>
@@ -2393,7 +2395,7 @@
           <a:p>
             <a:r>
               <a:rPr lang="en-US" dirty="0"/>
-              <a:t>Let us copy Types of Weathering. There are two main types of weathering. On this slide we have Physical weathering and Chemical weathering. Write each point on a new line, with the key term first, and explain it in your own words when we revise.</a:t>
+              <a:t>Let us copy Types of Weathering. There are two main types of weathering. Copy the point on Physical (mechanical) weathering on the left, then draw the diagram on the right: physical and chemical weathering. Give it a title and label it clearly.</a:t>
             </a:r>
             <a:endParaRPr lang="en-US" dirty="0"/>
           </a:p>
@@ -2569,7 +2571,7 @@
           <a:p>
             <a:r>
               <a:rPr lang="en-US" dirty="0"/>
-              <a:t>Now draw this illustration in your notebook: types of weathering. Give it a title and label it clearly.</a:t>
+              <a:t>We continue with Types of Weathering. On this slide we have Chemical weathering. Write each point on a new line, with the key term first, and explain it in your own words when we revise.</a:t>
             </a:r>
             <a:endParaRPr lang="en-US" dirty="0"/>
           </a:p>
@@ -2657,7 +2659,7 @@
           <a:p>
             <a:r>
               <a:rPr lang="en-US" dirty="0"/>
-              <a:t>Let us copy Factors of Weathering. Weathering depends on the following factors. On this slide we have Climate and Rock characteristics. Write each point on a new line, with the key term first, and explain it in your own words when we revise. When you finish, we go to the next slide.</a:t>
+              <a:t>Let us copy General Factors of Weathering. Weathering depends on the following factors. On this slide we have Climate. Write each point on a new line, with the key term first, and explain it in your own words when we revise.</a:t>
             </a:r>
             <a:endParaRPr lang="en-US" dirty="0"/>
           </a:p>
@@ -2745,7 +2747,7 @@
           <a:p>
             <a:r>
               <a:rPr lang="en-US" dirty="0"/>
-              <a:t>We continue with Factors of Weathering. On this slide we have Vegetation, Time and Human activities. Write each point on a new line, with the key term first, and explain it in your own words when we revise.</a:t>
+              <a:t>Copy the point on Rock characteristics on the left, then draw the diagram on the right: an old weathered wall. Give it a title and label it clearly.</a:t>
             </a:r>
             <a:endParaRPr lang="en-US" dirty="0"/>
           </a:p>
@@ -2833,7 +2835,7 @@
           <a:p>
             <a:r>
               <a:rPr lang="en-US" dirty="0"/>
-              <a:t>Now let us check what you have understood. Question 1: What is weathering? Answer in your exercise book.</a:t>
+              <a:t>Copy the point on Vegetation on the left, then draw the diagram on the right: roots in a rock. Give it a title and label it clearly.</a:t>
             </a:r>
             <a:endParaRPr lang="en-US" dirty="0"/>
           </a:p>
@@ -2921,7 +2923,7 @@
           <a:p>
             <a:r>
               <a:rPr lang="en-US" dirty="0"/>
-              <a:t>The expected answer is: the breaking down of rocks in their place. If you got it right, well done.</a:t>
+              <a:t>We continue with General Factors of Weathering. On this slide we have Time and Human activities. Write each point on a new line, with the key term first, and explain it in your own words when we revise.</a:t>
             </a:r>
             <a:endParaRPr lang="en-US" dirty="0"/>
           </a:p>
@@ -3009,7 +3011,7 @@
           <a:p>
             <a:r>
               <a:rPr lang="en-US" dirty="0"/>
-              <a:t>Now let us check what you have understood. Question 2: Give the two types of weathering. Answer in your exercise book.</a:t>
+              <a:t>Now let us check what you have understood. Question 1: What is weathering? Answer in your exercise book.</a:t>
             </a:r>
             <a:endParaRPr lang="en-US" dirty="0"/>
           </a:p>
@@ -3097,7 +3099,7 @@
           <a:p>
             <a:r>
               <a:rPr lang="en-US" dirty="0"/>
-              <a:t>The expected answer is: physical and chemical weathering. If you got it right, well done.</a:t>
+              <a:t>The expected answer is: the breaking down of rocks in their place. If you got it right, well done.</a:t>
             </a:r>
             <a:endParaRPr lang="en-US" dirty="0"/>
           </a:p>
@@ -3185,7 +3187,7 @@
           <a:p>
             <a:r>
               <a:rPr lang="en-US" dirty="0"/>
-              <a:t>For those who need more practice, fill in the blanks in your exercise book. The answers are: number 1, physical; number 2, chemical; number 3, roots.</a:t>
+              <a:t>Now let us check what you have understood. Question 2: Give the two types of weathering. Answer in your exercise book.</a:t>
             </a:r>
             <a:endParaRPr lang="en-US" dirty="0"/>
           </a:p>
@@ -3273,7 +3275,7 @@
           <a:p>
             <a:r>
               <a:rPr lang="en-US" dirty="0"/>
-              <a:t>For your homework: Touch a big rock or a cement wall at 1 p.m. and again at 7 p.m. Write what you feel, and why this could break the rock after many years. We shall correct it at the beginning of our next lesson.</a:t>
+              <a:t>The expected answer is: physical and chemical weathering. If you got it right, well done.</a:t>
             </a:r>
             <a:endParaRPr lang="en-US" dirty="0"/>
           </a:p>
@@ -3361,7 +3363,7 @@
           <a:p>
             <a:r>
               <a:rPr lang="en-US" dirty="0"/>
-              <a:t>Our next lesson will be on Lesson 16: Physical Weathering Processes and Products. Thank you for your attention, and see you next time.</a:t>
+              <a:t>For those who need more practice, fill in the blanks in your exercise book. The answers are: number 1, physical; number 2, chemical; number 3, roots.</a:t>
             </a:r>
             <a:endParaRPr lang="en-US" dirty="0"/>
           </a:p>
@@ -3537,7 +3539,7 @@
           <a:p>
             <a:r>
               <a:rPr lang="en-US" dirty="0"/>
-              <a:t>Let us play the bilingual game. I say a word in English, and you give me the French word. Then we do the reverse.</a:t>
+              <a:t>For your homework: Touch a big rock or a cement wall at 1 p.m. and again at 7 p.m. Write what you feel, and why this could break the rock after many years. We shall correct it at the beginning of our next lesson.</a:t>
             </a:r>
             <a:endParaRPr lang="en-US" dirty="0"/>
           </a:p>
@@ -3625,7 +3627,7 @@
           <a:p>
             <a:r>
               <a:rPr lang="en-US" dirty="0"/>
-              <a:t>I record this information in the official logbook of the class after the lesson.</a:t>
+              <a:t>Our next lesson will be on Lesson 16: Physical Weathering Processes and Products. Thank you for your attention, and see you next time.</a:t>
             </a:r>
             <a:endParaRPr lang="en-US" dirty="0"/>
           </a:p>
@@ -3713,7 +3715,7 @@
           <a:p>
             <a:r>
               <a:rPr lang="en-US" dirty="0"/>
-              <a:t>I complete the second page of the logbook: the matter taught, the evaluation, the homework and the attendance.</a:t>
+              <a:t>Let us play the bilingual game. I say a word in English, and you give me the French word. Then we do the reverse.</a:t>
             </a:r>
             <a:endParaRPr lang="en-US" dirty="0"/>
           </a:p>
@@ -3801,7 +3803,7 @@
           <a:p>
             <a:r>
               <a:rPr lang="en-US" dirty="0"/>
-              <a:t>This slide is for me, the teacher: it gives the timing of the lesson and what to do if the projector is not available.</a:t>
+              <a:t>I record this information in the official logbook of the class after the lesson.</a:t>
             </a:r>
             <a:endParaRPr lang="en-US" dirty="0"/>
           </a:p>
@@ -3889,7 +3891,7 @@
           <a:p>
             <a:r>
               <a:rPr lang="en-US" dirty="0"/>
-              <a:t>These are the references and picture credits used to prepare this lesson.</a:t>
+              <a:t>I complete the second page of the logbook: the matter taught, the evaluation, the homework and the attendance.</a:t>
             </a:r>
             <a:endParaRPr lang="en-US" dirty="0"/>
           </a:p>
@@ -3913,6 +3915,182 @@
             <a:fld id="{F7021451-1387-4CA6-816F-3879F97B5CBC}" type="slidenum">
               <a:rPr lang="en-US"/>
               <a:t>44</a:t>
+            </a:fld>
+            <a:endParaRPr lang="en-US"/>
+          </a:p>
+        </p:txBody>
+      </p:sp>
+    </p:spTree>
+    <p:extLst>
+      <p:ext uri="{BB962C8B-B14F-4D97-AF65-F5344CB8AC3E}">
+        <p14:creationId xmlns:p14="http://schemas.microsoft.com/office/powerpoint/2010/main" val="1024086991"/>
+      </p:ext>
+    </p:extLst>
+  </p:cSld>
+  <p:clrMapOvr>
+    <a:masterClrMapping/>
+  </p:clrMapOvr>
+</p:notes>
+</file>
+
+<file path=ppt/notesSlides/notesSlide45.xml><?xml version="1.0" encoding="utf-8"?>
+<p:notes xmlns:a="http://schemas.openxmlformats.org/drawingml/2006/main" xmlns:r="http://schemas.openxmlformats.org/officeDocument/2006/relationships" xmlns:p="http://schemas.openxmlformats.org/presentationml/2006/main">
+  <p:cSld>
+    <p:spTree>
+      <p:nvGrpSpPr>
+        <p:cNvPr id="1" name=""/>
+        <p:cNvGrpSpPr/>
+        <p:nvPr/>
+      </p:nvGrpSpPr>
+      <p:grpSpPr>
+        <a:xfrm>
+          <a:off x="0" y="0"/>
+          <a:ext cx="0" cy="0"/>
+          <a:chOff x="0" y="0"/>
+          <a:chExt cx="0" cy="0"/>
+        </a:xfrm>
+      </p:grpSpPr>
+      <p:sp>
+        <p:nvSpPr>
+          <p:cNvPr id="2" name="Slide Image Placeholder 1"/>
+          <p:cNvSpPr>
+            <a:spLocks noGrp="1" noRot="1" noChangeAspect="1"/>
+          </p:cNvSpPr>
+          <p:nvPr>
+            <p:ph type="sldImg"/>
+          </p:nvPr>
+        </p:nvSpPr>
+        <p:spPr/>
+      </p:sp>
+      <p:sp>
+        <p:nvSpPr>
+          <p:cNvPr id="3" name="Notes Placeholder 2"/>
+          <p:cNvSpPr>
+            <a:spLocks noGrp="1"/>
+          </p:cNvSpPr>
+          <p:nvPr>
+            <p:ph type="body" idx="1"/>
+          </p:nvPr>
+        </p:nvSpPr>
+        <p:spPr/>
+        <p:txBody>
+          <a:bodyPr/>
+          <a:lstStyle/>
+          <a:p>
+            <a:r>
+              <a:rPr lang="en-US" dirty="0"/>
+              <a:t>This slide is for me, the teacher: it gives the timing of the lesson and what to do if the projector is not available.</a:t>
+            </a:r>
+            <a:endParaRPr lang="en-US" dirty="0"/>
+          </a:p>
+        </p:txBody>
+      </p:sp>
+      <p:sp>
+        <p:nvSpPr>
+          <p:cNvPr id="4" name="Slide Number Placeholder 3"/>
+          <p:cNvSpPr>
+            <a:spLocks noGrp="1"/>
+          </p:cNvSpPr>
+          <p:nvPr>
+            <p:ph type="sldNum" sz="quarter" idx="10"/>
+          </p:nvPr>
+        </p:nvSpPr>
+        <p:spPr/>
+        <p:txBody>
+          <a:bodyPr/>
+          <a:lstStyle/>
+          <a:p>
+            <a:fld id="{F7021451-1387-4CA6-816F-3879F97B5CBC}" type="slidenum">
+              <a:rPr lang="en-US"/>
+              <a:t>45</a:t>
+            </a:fld>
+            <a:endParaRPr lang="en-US"/>
+          </a:p>
+        </p:txBody>
+      </p:sp>
+    </p:spTree>
+    <p:extLst>
+      <p:ext uri="{BB962C8B-B14F-4D97-AF65-F5344CB8AC3E}">
+        <p14:creationId xmlns:p14="http://schemas.microsoft.com/office/powerpoint/2010/main" val="1024086991"/>
+      </p:ext>
+    </p:extLst>
+  </p:cSld>
+  <p:clrMapOvr>
+    <a:masterClrMapping/>
+  </p:clrMapOvr>
+</p:notes>
+</file>
+
+<file path=ppt/notesSlides/notesSlide46.xml><?xml version="1.0" encoding="utf-8"?>
+<p:notes xmlns:a="http://schemas.openxmlformats.org/drawingml/2006/main" xmlns:r="http://schemas.openxmlformats.org/officeDocument/2006/relationships" xmlns:p="http://schemas.openxmlformats.org/presentationml/2006/main">
+  <p:cSld>
+    <p:spTree>
+      <p:nvGrpSpPr>
+        <p:cNvPr id="1" name=""/>
+        <p:cNvGrpSpPr/>
+        <p:nvPr/>
+      </p:nvGrpSpPr>
+      <p:grpSpPr>
+        <a:xfrm>
+          <a:off x="0" y="0"/>
+          <a:ext cx="0" cy="0"/>
+          <a:chOff x="0" y="0"/>
+          <a:chExt cx="0" cy="0"/>
+        </a:xfrm>
+      </p:grpSpPr>
+      <p:sp>
+        <p:nvSpPr>
+          <p:cNvPr id="2" name="Slide Image Placeholder 1"/>
+          <p:cNvSpPr>
+            <a:spLocks noGrp="1" noRot="1" noChangeAspect="1"/>
+          </p:cNvSpPr>
+          <p:nvPr>
+            <p:ph type="sldImg"/>
+          </p:nvPr>
+        </p:nvSpPr>
+        <p:spPr/>
+      </p:sp>
+      <p:sp>
+        <p:nvSpPr>
+          <p:cNvPr id="3" name="Notes Placeholder 2"/>
+          <p:cNvSpPr>
+            <a:spLocks noGrp="1"/>
+          </p:cNvSpPr>
+          <p:nvPr>
+            <p:ph type="body" idx="1"/>
+          </p:nvPr>
+        </p:nvSpPr>
+        <p:spPr/>
+        <p:txBody>
+          <a:bodyPr/>
+          <a:lstStyle/>
+          <a:p>
+            <a:r>
+              <a:rPr lang="en-US" dirty="0"/>
+              <a:t>These are the references and picture credits used to prepare this lesson.</a:t>
+            </a:r>
+            <a:endParaRPr lang="en-US" dirty="0"/>
+          </a:p>
+        </p:txBody>
+      </p:sp>
+      <p:sp>
+        <p:nvSpPr>
+          <p:cNvPr id="4" name="Slide Number Placeholder 3"/>
+          <p:cNvSpPr>
+            <a:spLocks noGrp="1"/>
+          </p:cNvSpPr>
+          <p:nvPr>
+            <p:ph type="sldNum" sz="quarter" idx="10"/>
+          </p:nvPr>
+        </p:nvSpPr>
+        <p:spPr/>
+        <p:txBody>
+          <a:bodyPr/>
+          <a:lstStyle/>
+          <a:p>
+            <a:fld id="{F7021451-1387-4CA6-816F-3879F97B5CBC}" type="slidenum">
+              <a:rPr lang="en-US"/>
+              <a:t>46</a:t>
             </a:fld>
             <a:endParaRPr lang="en-US"/>
           </a:p>
@@ -4329,7 +4507,7 @@
           <a:p>
             <a:r>
               <a:rPr lang="en-US" dirty="0"/>
-              <a:t>Listen carefully to this situation from real life. In Sadou's compound, an old wall is cracked. Its stones break into sandy pieces at the bottom. A new wall with the same stones still looks strong. Think about it, because I am going to ask you some questions.</a:t>
+              <a:t>Listen carefully to this situation from real life. In Sadou's compound, an old wall is cracked, and its stones break into sandy pieces at the bottom, while a new wall built with the same stones still looks strong. Sadou asks: "What slowly breaks the stones of the old wall, and why faster in some places than in others?" Think about it, because I am going to ask you some questions.</a:t>
             </a:r>
             <a:endParaRPr lang="en-US" dirty="0"/>
           </a:p>
@@ -6012,7 +6190,7 @@
                 <a:ea typeface="Times New Roman" pitchFamily="34" charset="-122"/>
                 <a:cs typeface="Times New Roman" pitchFamily="34" charset="-120"/>
               </a:rPr>
-              <a:t>The old wall breaks into pieces.</a:t>
+              <a:t>Sadou does not know what breaks the stones of the old wall and why.</a:t>
             </a:r>
             <a:endParaRPr lang="en-US" sz="4000" dirty="0"/>
           </a:p>
@@ -6231,7 +6409,7 @@
                 <a:ea typeface="Times New Roman" pitchFamily="34" charset="-122"/>
                 <a:cs typeface="Times New Roman" pitchFamily="34" charset="-120"/>
               </a:rPr>
-              <a:t>Why is the old wall weaker than the new one?</a:t>
+              <a:t>What happens to the stones of the old wall?</a:t>
             </a:r>
             <a:endParaRPr lang="en-US" sz="4000" dirty="0"/>
           </a:p>
@@ -6450,7 +6628,7 @@
                 <a:ea typeface="Times New Roman" pitchFamily="34" charset="-122"/>
                 <a:cs typeface="Times New Roman" pitchFamily="34" charset="-120"/>
               </a:rPr>
-              <a:t>It has been in the sun and rain for many years.</a:t>
+              <a:t>They crack and break into sandy pieces.</a:t>
             </a:r>
             <a:endParaRPr lang="en-US" sz="4000" dirty="0"/>
           </a:p>
@@ -6669,7 +6847,7 @@
                 <a:ea typeface="Times New Roman" pitchFamily="34" charset="-122"/>
                 <a:cs typeface="Times New Roman" pitchFamily="34" charset="-120"/>
               </a:rPr>
-              <a:t>What do we call this slow breaking of rock?</a:t>
+              <a:t>Why is the new wall still strong?</a:t>
             </a:r>
             <a:endParaRPr lang="en-US" sz="4000" dirty="0"/>
           </a:p>
@@ -6888,7 +7066,7 @@
                 <a:ea typeface="Times New Roman" pitchFamily="34" charset="-122"/>
                 <a:cs typeface="Times New Roman" pitchFamily="34" charset="-120"/>
               </a:rPr>
-              <a:t>Weathering.</a:t>
+              <a:t>It has not yet been exposed to the weather for a long time.</a:t>
             </a:r>
             <a:endParaRPr lang="en-US" sz="4000" dirty="0"/>
           </a:p>
@@ -7438,7 +7616,7 @@
                 <a:ea typeface="Calibri" pitchFamily="34" charset="-122"/>
                 <a:cs typeface="Calibri" pitchFamily="34" charset="-120"/>
               </a:rPr>
-              <a:t>1. MEANING OF WEATHERING</a:t>
+              <a:t>DEFINITIONS</a:t>
             </a:r>
             <a:endParaRPr lang="en-US" sz="1400" dirty="0"/>
           </a:p>
@@ -7540,7 +7718,7 @@
                 <a:ea typeface="Times New Roman" pitchFamily="34" charset="-122"/>
                 <a:cs typeface="Times New Roman" pitchFamily="34" charset="-120"/>
               </a:rPr>
-              <a:t>An old wall that is breaking.</a:t>
+              <a:t>An old wall.</a:t>
             </a:r>
             <a:endParaRPr lang="en-US" sz="1800" dirty="0"/>
           </a:p>
@@ -7652,7 +7830,7 @@
                 <a:ea typeface="Calibri" pitchFamily="34" charset="-122"/>
                 <a:cs typeface="Calibri" pitchFamily="34" charset="-120"/>
               </a:rPr>
-              <a:t>1. MEANING OF WEATHERING</a:t>
+              <a:t>DEFINITIONS</a:t>
             </a:r>
             <a:endParaRPr lang="en-US" sz="1400" dirty="0"/>
           </a:p>
@@ -8466,7 +8644,7 @@
                 <a:ea typeface="Calibri" pitchFamily="34" charset="-122"/>
                 <a:cs typeface="Calibri" pitchFamily="34" charset="-120"/>
               </a:rPr>
-              <a:t>1. MEANING OF WEATHERING</a:t>
+              <a:t>DEFINITIONS</a:t>
             </a:r>
             <a:endParaRPr lang="en-US" sz="1400" dirty="0"/>
           </a:p>
@@ -8573,7 +8751,7 @@
                 <a:ea typeface="Times New Roman" pitchFamily="34" charset="-122"/>
                 <a:cs typeface="Times New Roman" pitchFamily="34" charset="-120"/>
               </a:rPr>
-              <a:t>Sun, rain and air: weathering.</a:t>
+              <a:t>Sun, rain, air and plants: this is weathering.</a:t>
             </a:r>
             <a:endParaRPr lang="en-US" sz="4000" dirty="0"/>
           </a:p>
@@ -8685,7 +8863,7 @@
                 <a:ea typeface="Calibri" pitchFamily="34" charset="-122"/>
                 <a:cs typeface="Calibri" pitchFamily="34" charset="-120"/>
               </a:rPr>
-              <a:t>2. TYPES OF WEATHERING</a:t>
+              <a:t>1. TYPES OF WEATHERING</a:t>
             </a:r>
             <a:endParaRPr lang="en-US" sz="1400" dirty="0"/>
           </a:p>
@@ -8787,7 +8965,7 @@
                 <a:ea typeface="Times New Roman" pitchFamily="34" charset="-122"/>
                 <a:cs typeface="Times New Roman" pitchFamily="34" charset="-120"/>
               </a:rPr>
-              <a:t>A rusty piece of metal.</a:t>
+              <a:t>Rusty iron.</a:t>
             </a:r>
             <a:endParaRPr lang="en-US" sz="1800" dirty="0"/>
           </a:p>
@@ -8899,7 +9077,7 @@
                 <a:ea typeface="Calibri" pitchFamily="34" charset="-122"/>
                 <a:cs typeface="Calibri" pitchFamily="34" charset="-120"/>
               </a:rPr>
-              <a:t>2. TYPES OF WEATHERING</a:t>
+              <a:t>1. TYPES OF WEATHERING</a:t>
             </a:r>
             <a:endParaRPr lang="en-US" sz="1400" dirty="0"/>
           </a:p>
@@ -9006,7 +9184,7 @@
                 <a:ea typeface="Times New Roman" pitchFamily="34" charset="-122"/>
                 <a:cs typeface="Times New Roman" pitchFamily="34" charset="-120"/>
               </a:rPr>
-              <a:t>Rain and air make iron red and weak. Which type of weathering is similar?</a:t>
+              <a:t>Rain and air change iron into red, weak rust. Which type of weathering changes rocks in the same way?</a:t>
             </a:r>
             <a:endParaRPr lang="en-US" sz="4000" dirty="0"/>
           </a:p>
@@ -9118,7 +9296,7 @@
                 <a:ea typeface="Calibri" pitchFamily="34" charset="-122"/>
                 <a:cs typeface="Calibri" pitchFamily="34" charset="-120"/>
               </a:rPr>
-              <a:t>2. TYPES OF WEATHERING</a:t>
+              <a:t>1. TYPES OF WEATHERING</a:t>
             </a:r>
             <a:endParaRPr lang="en-US" sz="1400" dirty="0"/>
           </a:p>
@@ -9337,7 +9515,7 @@
                 <a:ea typeface="Calibri" pitchFamily="34" charset="-122"/>
                 <a:cs typeface="Calibri" pitchFamily="34" charset="-120"/>
               </a:rPr>
-              <a:t>3. FACTORS OF WEATHERING</a:t>
+              <a:t>2. GENERAL FACTORS OF WEATHERING</a:t>
             </a:r>
             <a:endParaRPr lang="en-US" sz="1400" dirty="0"/>
           </a:p>
@@ -9439,7 +9617,7 @@
                 <a:ea typeface="Times New Roman" pitchFamily="34" charset="-122"/>
                 <a:cs typeface="Times New Roman" pitchFamily="34" charset="-120"/>
               </a:rPr>
-              <a:t>Tree roots break a rock.</a:t>
+              <a:t>Roots in a rock.</a:t>
             </a:r>
             <a:endParaRPr lang="en-US" sz="1800" dirty="0"/>
           </a:p>
@@ -9551,7 +9729,7 @@
                 <a:ea typeface="Calibri" pitchFamily="34" charset="-122"/>
                 <a:cs typeface="Calibri" pitchFamily="34" charset="-120"/>
               </a:rPr>
-              <a:t>3. FACTORS OF WEATHERING</a:t>
+              <a:t>2. GENERAL FACTORS OF WEATHERING</a:t>
             </a:r>
             <a:endParaRPr lang="en-US" sz="1400" dirty="0"/>
           </a:p>
@@ -9770,7 +9948,7 @@
                 <a:ea typeface="Calibri" pitchFamily="34" charset="-122"/>
                 <a:cs typeface="Calibri" pitchFamily="34" charset="-120"/>
               </a:rPr>
-              <a:t>3. FACTORS OF WEATHERING</a:t>
+              <a:t>2. GENERAL FACTORS OF WEATHERING</a:t>
             </a:r>
             <a:endParaRPr lang="en-US" sz="1400" dirty="0"/>
           </a:p>
@@ -10271,7 +10449,7 @@
         <p:spPr>
           <a:xfrm>
             <a:off x="0" y="658368"/>
-            <a:ext cx="5120640" cy="5833872"/>
+            <a:ext cx="3840480" cy="5833872"/>
           </a:xfrm>
           <a:prstGeom prst="rect">
             <a:avLst/>
@@ -10286,8 +10464,8 @@
         </p:nvSpPr>
         <p:spPr>
           <a:xfrm>
-            <a:off x="5349240" y="1005840"/>
-            <a:ext cx="6522415" cy="731520"/>
+            <a:off x="4069080" y="1005840"/>
+            <a:ext cx="7802575" cy="731520"/>
           </a:xfrm>
           <a:prstGeom prst="rect">
             <a:avLst/>
@@ -10313,7 +10491,7 @@
                 <a:ea typeface="Times New Roman" pitchFamily="34" charset="-122"/>
                 <a:cs typeface="Times New Roman" pitchFamily="34" charset="-120"/>
               </a:rPr>
-              <a:t>1. Meaning of Weathering</a:t>
+              <a:t>DEFINITIONS</a:t>
             </a:r>
             <a:endParaRPr lang="en-US" sz="3600" dirty="0"/>
           </a:p>
@@ -10327,8 +10505,8 @@
         </p:nvSpPr>
         <p:spPr>
           <a:xfrm>
-            <a:off x="5349240" y="1783080"/>
-            <a:ext cx="6522415" cy="4663440"/>
+            <a:off x="4069080" y="1783080"/>
+            <a:ext cx="7802575" cy="4663440"/>
           </a:xfrm>
           <a:prstGeom prst="rect">
             <a:avLst/>
@@ -10355,7 +10533,7 @@
                 <a:ea typeface="Times New Roman" pitchFamily="34" charset="-122"/>
                 <a:cs typeface="Times New Roman" pitchFamily="34" charset="-120"/>
               </a:rPr>
-              <a:t>Weathering is defined as follows:</a:t>
+              <a:t>The key terms of this lesson are defined as follows:</a:t>
             </a:r>
             <a:endParaRPr lang="en-US" sz="4000" dirty="0"/>
           </a:p>
@@ -10392,7 +10570,7 @@
                 <a:ea typeface="Times New Roman" pitchFamily="34" charset="-122"/>
                 <a:cs typeface="Times New Roman" pitchFamily="34" charset="-120"/>
               </a:rPr>
-              <a:t>It is the breaking down of rocks in their place by the weather, plants and animals.</a:t>
+              <a:t>It is the breaking down or decay of rocks in their place, by the weather, plants and animals, without the rock being carried away.</a:t>
             </a:r>
             <a:endParaRPr lang="en-US" sz="4000" dirty="0"/>
           </a:p>
@@ -10510,9 +10688,129 @@
           </a:p>
         </p:txBody>
       </p:sp>
+      <p:sp>
+        <p:nvSpPr>
+          <p:cNvPr id="3" name="Text 1"/>
+          <p:cNvSpPr/>
+          <p:nvPr/>
+        </p:nvSpPr>
+        <p:spPr>
+          <a:xfrm>
+            <a:off x="365760" y="1005840"/>
+            <a:ext cx="11460175" cy="731520"/>
+          </a:xfrm>
+          <a:prstGeom prst="rect">
+            <a:avLst/>
+          </a:prstGeom>
+          <a:noFill/>
+          <a:ln/>
+        </p:spPr>
+        <p:txBody>
+          <a:bodyPr wrap="square" lIns="0" tIns="0" rIns="0" bIns="0" rtlCol="0" anchor="ctr">
+            <a:normAutofit/>
+          </a:bodyPr>
+          <a:lstStyle/>
+          <a:p>
+            <a:pPr algn="ctr" indent="0" marL="0">
+              <a:buNone/>
+            </a:pPr>
+            <a:r>
+              <a:rPr lang="en-US" sz="3600" b="1" dirty="0">
+                <a:solidFill>
+                  <a:srgbClr val="990011"/>
+                </a:solidFill>
+                <a:latin typeface="Times New Roman" pitchFamily="34" charset="0"/>
+                <a:ea typeface="Times New Roman" pitchFamily="34" charset="-122"/>
+                <a:cs typeface="Times New Roman" pitchFamily="34" charset="-120"/>
+              </a:rPr>
+              <a:t>1. Types of Weathering</a:t>
+            </a:r>
+            <a:endParaRPr lang="en-US" sz="3600" dirty="0"/>
+          </a:p>
+        </p:txBody>
+      </p:sp>
+      <p:sp>
+        <p:nvSpPr>
+          <p:cNvPr id="4" name="Text 2"/>
+          <p:cNvSpPr/>
+          <p:nvPr/>
+        </p:nvSpPr>
+        <p:spPr>
+          <a:xfrm>
+            <a:off x="365760" y="1783080"/>
+            <a:ext cx="4846320" cy="4617720"/>
+          </a:xfrm>
+          <a:prstGeom prst="rect">
+            <a:avLst/>
+          </a:prstGeom>
+          <a:noFill/>
+          <a:ln/>
+        </p:spPr>
+        <p:txBody>
+          <a:bodyPr wrap="square" lIns="0" tIns="0" rIns="0" bIns="0" rtlCol="0" anchor="t"/>
+          <a:lstStyle/>
+          <a:p>
+            <a:pPr algn="l" indent="0" marL="0">
+              <a:spcAft>
+                <a:spcPts val="800"/>
+              </a:spcAft>
+              <a:buNone/>
+            </a:pPr>
+            <a:r>
+              <a:rPr lang="en-US" sz="3200" i="1" dirty="0">
+                <a:solidFill>
+                  <a:srgbClr val="111111"/>
+                </a:solidFill>
+                <a:latin typeface="Times New Roman" pitchFamily="34" charset="0"/>
+                <a:ea typeface="Times New Roman" pitchFamily="34" charset="-122"/>
+                <a:cs typeface="Times New Roman" pitchFamily="34" charset="-120"/>
+              </a:rPr>
+              <a:t>There are two main types of weathering:</a:t>
+            </a:r>
+            <a:endParaRPr lang="en-US" sz="3200" dirty="0"/>
+          </a:p>
+          <a:p>
+            <a:pPr algn="l" indent="0" marL="0">
+              <a:spcAft>
+                <a:spcPts val="800"/>
+              </a:spcAft>
+              <a:buNone/>
+            </a:pPr>
+            <a:r>
+              <a:rPr lang="en-US" sz="3200" b="1" dirty="0">
+                <a:solidFill>
+                  <a:srgbClr val="111111"/>
+                </a:solidFill>
+                <a:latin typeface="Times New Roman" pitchFamily="34" charset="0"/>
+                <a:ea typeface="Times New Roman" pitchFamily="34" charset="-122"/>
+                <a:cs typeface="Times New Roman" pitchFamily="34" charset="-120"/>
+              </a:rPr>
+              <a:t>Physical (mechanical) weathering: </a:t>
+            </a:r>
+            <a:pPr algn="l" indent="0" marL="0">
+              <a:spcAft>
+                <a:spcPts val="800"/>
+              </a:spcAft>
+              <a:buNone/>
+            </a:pPr>
+            <a:r>
+              <a:rPr lang="en-US" sz="3200" dirty="0">
+                <a:solidFill>
+                  <a:srgbClr val="111111"/>
+                </a:solidFill>
+                <a:latin typeface="Times New Roman" pitchFamily="34" charset="0"/>
+                <a:ea typeface="Times New Roman" pitchFamily="34" charset="-122"/>
+                <a:cs typeface="Times New Roman" pitchFamily="34" charset="-120"/>
+              </a:rPr>
+              <a:t>Rocks break into smaller pieces without any change in their minerals. It is common in hot deserts and cold mountains.</a:t>
+            </a:r>
+            <a:endParaRPr lang="en-US" sz="3200" dirty="0"/>
+          </a:p>
+        </p:txBody>
+      </p:sp>
       <p:pic>
         <p:nvPicPr>
-          <p:cNvPr id="3" name="Image 0" descr="/home/claude/f4/img/minesec_sheet.png">    </p:cNvPr>
+          <p:cNvPr id="5" name="Image 0" descr="/home/claude/f4/img/v2/weathering_types_big.png">    </p:cNvPr>
           <p:cNvPicPr>
             <a:picLocks noChangeAspect="1"/>
           </p:cNvPicPr>
@@ -10526,8 +10824,8 @@
         </p:blipFill>
         <p:spPr>
           <a:xfrm>
-            <a:off x="0" y="658368"/>
-            <a:ext cx="2468880" cy="5833872"/>
+            <a:off x="5349240" y="2617506"/>
+            <a:ext cx="6659575" cy="2601397"/>
           </a:xfrm>
           <a:prstGeom prst="rect">
             <a:avLst/>
@@ -10536,14 +10834,14 @@
       </p:pic>
       <p:sp>
         <p:nvSpPr>
-          <p:cNvPr id="4" name="Text 1"/>
+          <p:cNvPr id="6" name="Text 3"/>
           <p:cNvSpPr/>
           <p:nvPr/>
         </p:nvSpPr>
         <p:spPr>
           <a:xfrm>
-            <a:off x="2697480" y="1005840"/>
-            <a:ext cx="9174175" cy="731520"/>
+            <a:off x="5349240" y="6089904"/>
+            <a:ext cx="6659575" cy="347472"/>
           </a:xfrm>
           <a:prstGeom prst="rect">
             <a:avLst/>
@@ -10552,142 +10850,24 @@
           <a:ln/>
         </p:spPr>
         <p:txBody>
-          <a:bodyPr wrap="square" lIns="0" tIns="0" rIns="0" bIns="0" rtlCol="0" anchor="ctr">
-            <a:normAutofit/>
-          </a:bodyPr>
+          <a:bodyPr wrap="square" lIns="0" tIns="0" rIns="0" bIns="0" rtlCol="0" anchor="ctr"/>
           <a:lstStyle/>
           <a:p>
             <a:pPr algn="ctr" indent="0" marL="0">
               <a:buNone/>
             </a:pPr>
             <a:r>
-              <a:rPr lang="en-US" sz="3600" b="1" dirty="0">
-                <a:solidFill>
-                  <a:srgbClr val="990011"/>
+              <a:rPr lang="en-US" sz="1600" i="1" dirty="0">
+                <a:solidFill>
+                  <a:srgbClr val="555555"/>
                 </a:solidFill>
                 <a:latin typeface="Times New Roman" pitchFamily="34" charset="0"/>
                 <a:ea typeface="Times New Roman" pitchFamily="34" charset="-122"/>
                 <a:cs typeface="Times New Roman" pitchFamily="34" charset="-120"/>
               </a:rPr>
-              <a:t>2. Types of Weathering</a:t>
-            </a:r>
-            <a:endParaRPr lang="en-US" sz="3600" dirty="0"/>
-          </a:p>
-        </p:txBody>
-      </p:sp>
-      <p:sp>
-        <p:nvSpPr>
-          <p:cNvPr id="5" name="Text 2"/>
-          <p:cNvSpPr/>
-          <p:nvPr/>
-        </p:nvSpPr>
-        <p:spPr>
-          <a:xfrm>
-            <a:off x="2697480" y="1783080"/>
-            <a:ext cx="9174175" cy="4663440"/>
-          </a:xfrm>
-          <a:prstGeom prst="rect">
-            <a:avLst/>
-          </a:prstGeom>
-          <a:noFill/>
-          <a:ln/>
-        </p:spPr>
-        <p:txBody>
-          <a:bodyPr wrap="square" lIns="0" tIns="0" rIns="0" bIns="0" rtlCol="0" anchor="t"/>
-          <a:lstStyle/>
-          <a:p>
-            <a:pPr algn="l" indent="0" marL="0">
-              <a:spcAft>
-                <a:spcPts val="800"/>
-              </a:spcAft>
-              <a:buNone/>
-            </a:pPr>
-            <a:r>
-              <a:rPr lang="en-US" sz="4000" i="1" dirty="0">
-                <a:solidFill>
-                  <a:srgbClr val="111111"/>
-                </a:solidFill>
-                <a:latin typeface="Times New Roman" pitchFamily="34" charset="0"/>
-                <a:ea typeface="Times New Roman" pitchFamily="34" charset="-122"/>
-                <a:cs typeface="Times New Roman" pitchFamily="34" charset="-120"/>
-              </a:rPr>
-              <a:t>There are two main types of weathering:</a:t>
-            </a:r>
-            <a:endParaRPr lang="en-US" sz="4000" dirty="0"/>
-          </a:p>
-          <a:p>
-            <a:pPr algn="l" indent="0" marL="0">
-              <a:spcAft>
-                <a:spcPts val="800"/>
-              </a:spcAft>
-              <a:buNone/>
-            </a:pPr>
-            <a:r>
-              <a:rPr lang="en-US" sz="4000" b="1" dirty="0">
-                <a:solidFill>
-                  <a:srgbClr val="111111"/>
-                </a:solidFill>
-                <a:latin typeface="Times New Roman" pitchFamily="34" charset="0"/>
-                <a:ea typeface="Times New Roman" pitchFamily="34" charset="-122"/>
-                <a:cs typeface="Times New Roman" pitchFamily="34" charset="-120"/>
-              </a:rPr>
-              <a:t>Physical weathering: </a:t>
-            </a:r>
-            <a:pPr algn="l" indent="0" marL="0">
-              <a:spcAft>
-                <a:spcPts val="800"/>
-              </a:spcAft>
-              <a:buNone/>
-            </a:pPr>
-            <a:r>
-              <a:rPr lang="en-US" sz="4000" dirty="0">
-                <a:solidFill>
-                  <a:srgbClr val="111111"/>
-                </a:solidFill>
-                <a:latin typeface="Times New Roman" pitchFamily="34" charset="0"/>
-                <a:ea typeface="Times New Roman" pitchFamily="34" charset="-122"/>
-                <a:cs typeface="Times New Roman" pitchFamily="34" charset="-120"/>
-              </a:rPr>
-              <a:t>Rocks break into smaller pieces without any change in their minerals.</a:t>
-            </a:r>
-            <a:endParaRPr lang="en-US" sz="4000" dirty="0"/>
-          </a:p>
-          <a:p>
-            <a:pPr algn="l" indent="0" marL="0">
-              <a:spcAft>
-                <a:spcPts val="800"/>
-              </a:spcAft>
-              <a:buNone/>
-            </a:pPr>
-            <a:r>
-              <a:rPr lang="en-US" sz="4000" b="1" dirty="0">
-                <a:solidFill>
-                  <a:srgbClr val="111111"/>
-                </a:solidFill>
-                <a:latin typeface="Times New Roman" pitchFamily="34" charset="0"/>
-                <a:ea typeface="Times New Roman" pitchFamily="34" charset="-122"/>
-                <a:cs typeface="Times New Roman" pitchFamily="34" charset="-120"/>
-              </a:rPr>
-              <a:t>Chemical weathering: </a:t>
-            </a:r>
-            <a:pPr algn="l" indent="0" marL="0">
-              <a:spcAft>
-                <a:spcPts val="800"/>
-              </a:spcAft>
-              <a:buNone/>
-            </a:pPr>
-            <a:r>
-              <a:rPr lang="en-US" sz="4000" dirty="0">
-                <a:solidFill>
-                  <a:srgbClr val="111111"/>
-                </a:solidFill>
-                <a:latin typeface="Times New Roman" pitchFamily="34" charset="0"/>
-                <a:ea typeface="Times New Roman" pitchFamily="34" charset="-122"/>
-                <a:cs typeface="Times New Roman" pitchFamily="34" charset="-120"/>
-              </a:rPr>
-              <a:t>The minerals of the rock are changed by water and air, so the rock rots.</a:t>
-            </a:r>
-            <a:endParaRPr lang="en-US" sz="4000" dirty="0"/>
+              <a:t>Illustration: physical and chemical weathering</a:t>
+            </a:r>
+            <a:endParaRPr lang="en-US" sz="1600" dirty="0"/>
           </a:p>
         </p:txBody>
       </p:sp>
@@ -11812,48 +11992,9 @@
           </a:p>
         </p:txBody>
       </p:sp>
-      <p:sp>
-        <p:nvSpPr>
-          <p:cNvPr id="3" name="Text 1"/>
-          <p:cNvSpPr/>
-          <p:nvPr/>
-        </p:nvSpPr>
-        <p:spPr>
-          <a:xfrm>
-            <a:off x="457200" y="1005840"/>
-            <a:ext cx="11277295" cy="731520"/>
-          </a:xfrm>
-          <a:prstGeom prst="rect">
-            <a:avLst/>
-          </a:prstGeom>
-          <a:noFill/>
-          <a:ln/>
-        </p:spPr>
-        <p:txBody>
-          <a:bodyPr wrap="square" lIns="0" tIns="0" rIns="0" bIns="0" rtlCol="0" anchor="ctr"/>
-          <a:lstStyle/>
-          <a:p>
-            <a:pPr algn="ctr" indent="0" marL="0">
-              <a:buNone/>
-            </a:pPr>
-            <a:r>
-              <a:rPr lang="en-US" sz="3600" b="1" dirty="0">
-                <a:solidFill>
-                  <a:srgbClr val="990011"/>
-                </a:solidFill>
-                <a:latin typeface="Times New Roman" pitchFamily="34" charset="0"/>
-                <a:ea typeface="Times New Roman" pitchFamily="34" charset="-122"/>
-                <a:cs typeface="Times New Roman" pitchFamily="34" charset="-120"/>
-              </a:rPr>
-              <a:t>2. Types of Weathering</a:t>
-            </a:r>
-            <a:endParaRPr lang="en-US" sz="3600" dirty="0"/>
-          </a:p>
-        </p:txBody>
-      </p:sp>
       <p:pic>
         <p:nvPicPr>
-          <p:cNvPr id="4" name="Image 0" descr="/home/claude/f4/img/v2/weathering_types_big.png">    </p:cNvPr>
+          <p:cNvPr id="3" name="Image 0" descr="/home/claude/f4/img/minesec_sheet.png">    </p:cNvPr>
           <p:cNvPicPr>
             <a:picLocks noChangeAspect="1"/>
           </p:cNvPicPr>
@@ -11867,8 +12008,8 @@
         </p:blipFill>
         <p:spPr>
           <a:xfrm>
-            <a:off x="629930" y="1783080"/>
-            <a:ext cx="10931835" cy="4270248"/>
+            <a:off x="0" y="658368"/>
+            <a:ext cx="5120640" cy="5833872"/>
           </a:xfrm>
           <a:prstGeom prst="rect">
             <a:avLst/>
@@ -11877,14 +12018,14 @@
       </p:pic>
       <p:sp>
         <p:nvSpPr>
-          <p:cNvPr id="5" name="Text 2"/>
+          <p:cNvPr id="4" name="Text 1"/>
           <p:cNvSpPr/>
           <p:nvPr/>
         </p:nvSpPr>
         <p:spPr>
           <a:xfrm>
-            <a:off x="457200" y="6089904"/>
-            <a:ext cx="11277295" cy="347472"/>
+            <a:off x="5349240" y="1005840"/>
+            <a:ext cx="6522415" cy="731520"/>
           </a:xfrm>
           <a:prstGeom prst="rect">
             <a:avLst/>
@@ -11893,24 +12034,85 @@
           <a:ln/>
         </p:spPr>
         <p:txBody>
-          <a:bodyPr wrap="square" lIns="0" tIns="0" rIns="0" bIns="0" rtlCol="0" anchor="ctr"/>
+          <a:bodyPr wrap="square" lIns="0" tIns="0" rIns="0" bIns="0" rtlCol="0" anchor="ctr">
+            <a:normAutofit/>
+          </a:bodyPr>
           <a:lstStyle/>
           <a:p>
             <a:pPr algn="ctr" indent="0" marL="0">
               <a:buNone/>
             </a:pPr>
             <a:r>
-              <a:rPr lang="en-US" sz="1800" i="1" dirty="0">
-                <a:solidFill>
-                  <a:srgbClr val="555555"/>
+              <a:rPr lang="en-US" sz="3600" b="1" dirty="0">
+                <a:solidFill>
+                  <a:srgbClr val="990011"/>
                 </a:solidFill>
                 <a:latin typeface="Times New Roman" pitchFamily="34" charset="0"/>
                 <a:ea typeface="Times New Roman" pitchFamily="34" charset="-122"/>
                 <a:cs typeface="Times New Roman" pitchFamily="34" charset="-120"/>
               </a:rPr>
-              <a:t>Illustration: types of weathering</a:t>
-            </a:r>
-            <a:endParaRPr lang="en-US" sz="1800" dirty="0"/>
+              <a:t>1. Types of Weathering</a:t>
+            </a:r>
+            <a:endParaRPr lang="en-US" sz="3600" dirty="0"/>
+          </a:p>
+        </p:txBody>
+      </p:sp>
+      <p:sp>
+        <p:nvSpPr>
+          <p:cNvPr id="5" name="Text 2"/>
+          <p:cNvSpPr/>
+          <p:nvPr/>
+        </p:nvSpPr>
+        <p:spPr>
+          <a:xfrm>
+            <a:off x="5349240" y="1783080"/>
+            <a:ext cx="6522415" cy="4663440"/>
+          </a:xfrm>
+          <a:prstGeom prst="rect">
+            <a:avLst/>
+          </a:prstGeom>
+          <a:noFill/>
+          <a:ln/>
+        </p:spPr>
+        <p:txBody>
+          <a:bodyPr wrap="square" lIns="0" tIns="0" rIns="0" bIns="0" rtlCol="0" anchor="t"/>
+          <a:lstStyle/>
+          <a:p>
+            <a:pPr algn="l" indent="0" marL="0">
+              <a:spcAft>
+                <a:spcPts val="800"/>
+              </a:spcAft>
+              <a:buNone/>
+            </a:pPr>
+            <a:r>
+              <a:rPr lang="en-US" sz="4000" b="1" dirty="0">
+                <a:solidFill>
+                  <a:srgbClr val="111111"/>
+                </a:solidFill>
+                <a:latin typeface="Times New Roman" pitchFamily="34" charset="0"/>
+                <a:ea typeface="Times New Roman" pitchFamily="34" charset="-122"/>
+                <a:cs typeface="Times New Roman" pitchFamily="34" charset="-120"/>
+              </a:rPr>
+              <a:t>Chemical weathering: </a:t>
+            </a:r>
+            <a:pPr algn="l" indent="0" marL="0">
+              <a:spcAft>
+                <a:spcPts val="800"/>
+              </a:spcAft>
+              <a:buNone/>
+            </a:pPr>
+            <a:r>
+              <a:rPr lang="en-US" sz="4000" dirty="0">
+                <a:solidFill>
+                  <a:srgbClr val="111111"/>
+                </a:solidFill>
+                <a:latin typeface="Times New Roman" pitchFamily="34" charset="0"/>
+                <a:ea typeface="Times New Roman" pitchFamily="34" charset="-122"/>
+                <a:cs typeface="Times New Roman" pitchFamily="34" charset="-120"/>
+              </a:rPr>
+              <a:t>The minerals of the rock are changed by water and air, so the rock rots or dissolves. It is common in hot, wet regions.</a:t>
+            </a:r>
+            <a:endParaRPr lang="en-US" sz="4000" dirty="0"/>
           </a:p>
         </p:txBody>
       </p:sp>
@@ -12043,7 +12245,7 @@
         <p:spPr>
           <a:xfrm>
             <a:off x="0" y="658368"/>
-            <a:ext cx="2468880" cy="5833872"/>
+            <a:ext cx="5120640" cy="5833872"/>
           </a:xfrm>
           <a:prstGeom prst="rect">
             <a:avLst/>
@@ -12058,8 +12260,8 @@
         </p:nvSpPr>
         <p:spPr>
           <a:xfrm>
-            <a:off x="2697480" y="1005840"/>
-            <a:ext cx="9174175" cy="731520"/>
+            <a:off x="5349240" y="1005840"/>
+            <a:ext cx="6522415" cy="731520"/>
           </a:xfrm>
           <a:prstGeom prst="rect">
             <a:avLst/>
@@ -12085,7 +12287,7 @@
                 <a:ea typeface="Times New Roman" pitchFamily="34" charset="-122"/>
                 <a:cs typeface="Times New Roman" pitchFamily="34" charset="-120"/>
               </a:rPr>
-              <a:t>3. Factors of Weathering</a:t>
+              <a:t>2. General Factors of Weathering</a:t>
             </a:r>
             <a:endParaRPr lang="en-US" sz="3600" dirty="0"/>
           </a:p>
@@ -12099,8 +12301,8 @@
         </p:nvSpPr>
         <p:spPr>
           <a:xfrm>
-            <a:off x="2697480" y="1783080"/>
-            <a:ext cx="9174175" cy="4663440"/>
+            <a:off x="5349240" y="1783080"/>
+            <a:ext cx="6522415" cy="4663440"/>
           </a:xfrm>
           <a:prstGeom prst="rect">
             <a:avLst/>
@@ -12165,43 +12367,6 @@
                 <a:cs typeface="Times New Roman" pitchFamily="34" charset="-120"/>
               </a:rPr>
               <a:t>Hot and wet climates favour chemical weathering, while hot deserts favour physical weathering.</a:t>
-            </a:r>
-            <a:endParaRPr lang="en-US" sz="4000" dirty="0"/>
-          </a:p>
-          <a:p>
-            <a:pPr algn="l" indent="0" marL="0">
-              <a:spcAft>
-                <a:spcPts val="800"/>
-              </a:spcAft>
-              <a:buNone/>
-            </a:pPr>
-            <a:r>
-              <a:rPr lang="en-US" sz="4000" b="1" dirty="0">
-                <a:solidFill>
-                  <a:srgbClr val="111111"/>
-                </a:solidFill>
-                <a:latin typeface="Times New Roman" pitchFamily="34" charset="0"/>
-                <a:ea typeface="Times New Roman" pitchFamily="34" charset="-122"/>
-                <a:cs typeface="Times New Roman" pitchFamily="34" charset="-120"/>
-              </a:rPr>
-              <a:t>Rock characteristics: </a:t>
-            </a:r>
-            <a:pPr algn="l" indent="0" marL="0">
-              <a:spcAft>
-                <a:spcPts val="800"/>
-              </a:spcAft>
-              <a:buNone/>
-            </a:pPr>
-            <a:r>
-              <a:rPr lang="en-US" sz="4000" dirty="0">
-                <a:solidFill>
-                  <a:srgbClr val="111111"/>
-                </a:solidFill>
-                <a:latin typeface="Times New Roman" pitchFamily="34" charset="0"/>
-                <a:ea typeface="Times New Roman" pitchFamily="34" charset="-122"/>
-                <a:cs typeface="Times New Roman" pitchFamily="34" charset="-120"/>
-              </a:rPr>
-              <a:t>Soft rocks and rocks with many joints break faster.</a:t>
             </a:r>
             <a:endParaRPr lang="en-US" sz="4000" dirty="0"/>
           </a:p>
@@ -12319,9 +12484,109 @@
           </a:p>
         </p:txBody>
       </p:sp>
+      <p:sp>
+        <p:nvSpPr>
+          <p:cNvPr id="3" name="Text 1"/>
+          <p:cNvSpPr/>
+          <p:nvPr/>
+        </p:nvSpPr>
+        <p:spPr>
+          <a:xfrm>
+            <a:off x="365760" y="1005840"/>
+            <a:ext cx="11460175" cy="731520"/>
+          </a:xfrm>
+          <a:prstGeom prst="rect">
+            <a:avLst/>
+          </a:prstGeom>
+          <a:noFill/>
+          <a:ln/>
+        </p:spPr>
+        <p:txBody>
+          <a:bodyPr wrap="square" lIns="0" tIns="0" rIns="0" bIns="0" rtlCol="0" anchor="ctr">
+            <a:normAutofit/>
+          </a:bodyPr>
+          <a:lstStyle/>
+          <a:p>
+            <a:pPr algn="ctr" indent="0" marL="0">
+              <a:buNone/>
+            </a:pPr>
+            <a:r>
+              <a:rPr lang="en-US" sz="3600" b="1" dirty="0">
+                <a:solidFill>
+                  <a:srgbClr val="990011"/>
+                </a:solidFill>
+                <a:latin typeface="Times New Roman" pitchFamily="34" charset="0"/>
+                <a:ea typeface="Times New Roman" pitchFamily="34" charset="-122"/>
+                <a:cs typeface="Times New Roman" pitchFamily="34" charset="-120"/>
+              </a:rPr>
+              <a:t>2. General Factors of Weathering</a:t>
+            </a:r>
+            <a:endParaRPr lang="en-US" sz="3600" dirty="0"/>
+          </a:p>
+        </p:txBody>
+      </p:sp>
+      <p:sp>
+        <p:nvSpPr>
+          <p:cNvPr id="4" name="Text 2"/>
+          <p:cNvSpPr/>
+          <p:nvPr/>
+        </p:nvSpPr>
+        <p:spPr>
+          <a:xfrm>
+            <a:off x="365760" y="1783080"/>
+            <a:ext cx="4846320" cy="4617720"/>
+          </a:xfrm>
+          <a:prstGeom prst="rect">
+            <a:avLst/>
+          </a:prstGeom>
+          <a:noFill/>
+          <a:ln/>
+        </p:spPr>
+        <p:txBody>
+          <a:bodyPr wrap="square" lIns="0" tIns="0" rIns="0" bIns="0" rtlCol="0" anchor="t"/>
+          <a:lstStyle/>
+          <a:p>
+            <a:pPr algn="l" indent="0" marL="0">
+              <a:spcAft>
+                <a:spcPts val="800"/>
+              </a:spcAft>
+              <a:buNone/>
+            </a:pPr>
+            <a:r>
+              <a:rPr lang="en-US" sz="3600" b="1" dirty="0">
+                <a:solidFill>
+                  <a:srgbClr val="111111"/>
+                </a:solidFill>
+                <a:latin typeface="Times New Roman" pitchFamily="34" charset="0"/>
+                <a:ea typeface="Times New Roman" pitchFamily="34" charset="-122"/>
+                <a:cs typeface="Times New Roman" pitchFamily="34" charset="-120"/>
+              </a:rPr>
+              <a:t>Rock characteristics: </a:t>
+            </a:r>
+            <a:pPr algn="l" indent="0" marL="0">
+              <a:spcAft>
+                <a:spcPts val="800"/>
+              </a:spcAft>
+              <a:buNone/>
+            </a:pPr>
+            <a:r>
+              <a:rPr lang="en-US" sz="3600" dirty="0">
+                <a:solidFill>
+                  <a:srgbClr val="111111"/>
+                </a:solidFill>
+                <a:latin typeface="Times New Roman" pitchFamily="34" charset="0"/>
+                <a:ea typeface="Times New Roman" pitchFamily="34" charset="-122"/>
+                <a:cs typeface="Times New Roman" pitchFamily="34" charset="-120"/>
+              </a:rPr>
+              <a:t>Soft rocks and rocks with many joints or soluble minerals break faster.</a:t>
+            </a:r>
+            <a:endParaRPr lang="en-US" sz="3600" dirty="0"/>
+          </a:p>
+        </p:txBody>
+      </p:sp>
       <p:pic>
         <p:nvPicPr>
-          <p:cNvPr id="3" name="Image 0" descr="/home/claude/f4/img/minesec_sheet.png">    </p:cNvPr>
+          <p:cNvPr id="5" name="Image 0" descr="/home/claude/f4/img/v2/f4_oldwall.jpg">    </p:cNvPr>
           <p:cNvPicPr>
             <a:picLocks noChangeAspect="1"/>
           </p:cNvPicPr>
@@ -12335,8 +12600,8 @@
         </p:blipFill>
         <p:spPr>
           <a:xfrm>
-            <a:off x="0" y="658368"/>
-            <a:ext cx="2468880" cy="5833872"/>
+            <a:off x="5349240" y="2071212"/>
+            <a:ext cx="6659575" cy="3693983"/>
           </a:xfrm>
           <a:prstGeom prst="rect">
             <a:avLst/>
@@ -12345,14 +12610,14 @@
       </p:pic>
       <p:sp>
         <p:nvSpPr>
-          <p:cNvPr id="4" name="Text 1"/>
+          <p:cNvPr id="6" name="Text 3"/>
           <p:cNvSpPr/>
           <p:nvPr/>
         </p:nvSpPr>
         <p:spPr>
           <a:xfrm>
-            <a:off x="2697480" y="1005840"/>
-            <a:ext cx="9174175" cy="731520"/>
+            <a:off x="5349240" y="6089904"/>
+            <a:ext cx="6659575" cy="347472"/>
           </a:xfrm>
           <a:prstGeom prst="rect">
             <a:avLst/>
@@ -12361,159 +12626,24 @@
           <a:ln/>
         </p:spPr>
         <p:txBody>
-          <a:bodyPr wrap="square" lIns="0" tIns="0" rIns="0" bIns="0" rtlCol="0" anchor="ctr">
-            <a:normAutofit/>
-          </a:bodyPr>
+          <a:bodyPr wrap="square" lIns="0" tIns="0" rIns="0" bIns="0" rtlCol="0" anchor="ctr"/>
           <a:lstStyle/>
           <a:p>
             <a:pPr algn="ctr" indent="0" marL="0">
               <a:buNone/>
             </a:pPr>
             <a:r>
-              <a:rPr lang="en-US" sz="3600" b="1" dirty="0">
-                <a:solidFill>
-                  <a:srgbClr val="990011"/>
+              <a:rPr lang="en-US" sz="1600" i="1" dirty="0">
+                <a:solidFill>
+                  <a:srgbClr val="555555"/>
                 </a:solidFill>
                 <a:latin typeface="Times New Roman" pitchFamily="34" charset="0"/>
                 <a:ea typeface="Times New Roman" pitchFamily="34" charset="-122"/>
                 <a:cs typeface="Times New Roman" pitchFamily="34" charset="-120"/>
               </a:rPr>
-              <a:t>3. Factors of Weathering (continued)</a:t>
-            </a:r>
-            <a:endParaRPr lang="en-US" sz="3600" dirty="0"/>
-          </a:p>
-        </p:txBody>
-      </p:sp>
-      <p:sp>
-        <p:nvSpPr>
-          <p:cNvPr id="5" name="Text 2"/>
-          <p:cNvSpPr/>
-          <p:nvPr/>
-        </p:nvSpPr>
-        <p:spPr>
-          <a:xfrm>
-            <a:off x="2697480" y="1783080"/>
-            <a:ext cx="9174175" cy="4663440"/>
-          </a:xfrm>
-          <a:prstGeom prst="rect">
-            <a:avLst/>
-          </a:prstGeom>
-          <a:noFill/>
-          <a:ln/>
-        </p:spPr>
-        <p:txBody>
-          <a:bodyPr wrap="square" lIns="0" tIns="0" rIns="0" bIns="0" rtlCol="0" anchor="t"/>
-          <a:lstStyle/>
-          <a:p>
-            <a:pPr algn="l" indent="0" marL="0">
-              <a:spcAft>
-                <a:spcPts val="800"/>
-              </a:spcAft>
-              <a:buNone/>
-            </a:pPr>
-            <a:r>
-              <a:rPr lang="en-US" sz="4000" b="1" dirty="0">
-                <a:solidFill>
-                  <a:srgbClr val="111111"/>
-                </a:solidFill>
-                <a:latin typeface="Times New Roman" pitchFamily="34" charset="0"/>
-                <a:ea typeface="Times New Roman" pitchFamily="34" charset="-122"/>
-                <a:cs typeface="Times New Roman" pitchFamily="34" charset="-120"/>
-              </a:rPr>
-              <a:t>Vegetation: </a:t>
-            </a:r>
-            <a:pPr algn="l" indent="0" marL="0">
-              <a:spcAft>
-                <a:spcPts val="800"/>
-              </a:spcAft>
-              <a:buNone/>
-            </a:pPr>
-            <a:r>
-              <a:rPr lang="en-US" sz="4000" dirty="0">
-                <a:solidFill>
-                  <a:srgbClr val="111111"/>
-                </a:solidFill>
-                <a:latin typeface="Times New Roman" pitchFamily="34" charset="0"/>
-                <a:ea typeface="Times New Roman" pitchFamily="34" charset="-122"/>
-                <a:cs typeface="Times New Roman" pitchFamily="34" charset="-120"/>
-              </a:rPr>
-              <a:t>Roots open cracks, and rotting plants produce acids that attack rocks.</a:t>
-            </a:r>
-            <a:endParaRPr lang="en-US" sz="4000" dirty="0"/>
-          </a:p>
-          <a:p>
-            <a:pPr algn="l" indent="0" marL="0">
-              <a:spcAft>
-                <a:spcPts val="800"/>
-              </a:spcAft>
-              <a:buNone/>
-            </a:pPr>
-            <a:r>
-              <a:rPr lang="en-US" sz="4000" b="1" dirty="0">
-                <a:solidFill>
-                  <a:srgbClr val="111111"/>
-                </a:solidFill>
-                <a:latin typeface="Times New Roman" pitchFamily="34" charset="0"/>
-                <a:ea typeface="Times New Roman" pitchFamily="34" charset="-122"/>
-                <a:cs typeface="Times New Roman" pitchFamily="34" charset="-120"/>
-              </a:rPr>
-              <a:t>Time: </a:t>
-            </a:r>
-            <a:pPr algn="l" indent="0" marL="0">
-              <a:spcAft>
-                <a:spcPts val="800"/>
-              </a:spcAft>
-              <a:buNone/>
-            </a:pPr>
-            <a:r>
-              <a:rPr lang="en-US" sz="4000" dirty="0">
-                <a:solidFill>
-                  <a:srgbClr val="111111"/>
-                </a:solidFill>
-                <a:latin typeface="Times New Roman" pitchFamily="34" charset="0"/>
-                <a:ea typeface="Times New Roman" pitchFamily="34" charset="-122"/>
-                <a:cs typeface="Times New Roman" pitchFamily="34" charset="-120"/>
-              </a:rPr>
-              <a:t>The longer rocks are exposed, the more they are weathered.</a:t>
-            </a:r>
-            <a:endParaRPr lang="en-US" sz="4000" dirty="0"/>
-          </a:p>
-          <a:p>
-            <a:pPr algn="l" indent="0" marL="0">
-              <a:spcAft>
-                <a:spcPts val="800"/>
-              </a:spcAft>
-              <a:buNone/>
-            </a:pPr>
-            <a:r>
-              <a:rPr lang="en-US" sz="4000" b="1" dirty="0">
-                <a:solidFill>
-                  <a:srgbClr val="111111"/>
-                </a:solidFill>
-                <a:latin typeface="Times New Roman" pitchFamily="34" charset="0"/>
-                <a:ea typeface="Times New Roman" pitchFamily="34" charset="-122"/>
-                <a:cs typeface="Times New Roman" pitchFamily="34" charset="-120"/>
-              </a:rPr>
-              <a:t>Human activities: </a:t>
-            </a:r>
-            <a:pPr algn="l" indent="0" marL="0">
-              <a:spcAft>
-                <a:spcPts val="800"/>
-              </a:spcAft>
-              <a:buNone/>
-            </a:pPr>
-            <a:r>
-              <a:rPr lang="en-US" sz="4000" dirty="0">
-                <a:solidFill>
-                  <a:srgbClr val="111111"/>
-                </a:solidFill>
-                <a:latin typeface="Times New Roman" pitchFamily="34" charset="0"/>
-                <a:ea typeface="Times New Roman" pitchFamily="34" charset="-122"/>
-                <a:cs typeface="Times New Roman" pitchFamily="34" charset="-120"/>
-              </a:rPr>
-              <a:t>Roads, quarries and farming expose rocks to weathering.</a:t>
-            </a:r>
-            <a:endParaRPr lang="en-US" sz="4000" dirty="0"/>
+              <a:t>Illustration: an old weathered wall</a:t>
+            </a:r>
+            <a:endParaRPr lang="en-US" sz="1600" dirty="0"/>
           </a:p>
         </p:txBody>
       </p:sp>
@@ -12623,15 +12753,115 @@
                 <a:ea typeface="Calibri" pitchFamily="34" charset="-122"/>
                 <a:cs typeface="Calibri" pitchFamily="34" charset="-120"/>
               </a:rPr>
-              <a:t>FORMATIVE EVALUATION</a:t>
+              <a:t>BOARD SUMMARY</a:t>
             </a:r>
             <a:endParaRPr lang="en-US" sz="1400" dirty="0"/>
+          </a:p>
+        </p:txBody>
+      </p:sp>
+      <p:sp>
+        <p:nvSpPr>
+          <p:cNvPr id="3" name="Text 1"/>
+          <p:cNvSpPr/>
+          <p:nvPr/>
+        </p:nvSpPr>
+        <p:spPr>
+          <a:xfrm>
+            <a:off x="365760" y="1005840"/>
+            <a:ext cx="11460175" cy="731520"/>
+          </a:xfrm>
+          <a:prstGeom prst="rect">
+            <a:avLst/>
+          </a:prstGeom>
+          <a:noFill/>
+          <a:ln/>
+        </p:spPr>
+        <p:txBody>
+          <a:bodyPr wrap="square" lIns="0" tIns="0" rIns="0" bIns="0" rtlCol="0" anchor="ctr">
+            <a:normAutofit/>
+          </a:bodyPr>
+          <a:lstStyle/>
+          <a:p>
+            <a:pPr algn="ctr" indent="0" marL="0">
+              <a:buNone/>
+            </a:pPr>
+            <a:r>
+              <a:rPr lang="en-US" sz="3600" b="1" dirty="0">
+                <a:solidFill>
+                  <a:srgbClr val="990011"/>
+                </a:solidFill>
+                <a:latin typeface="Times New Roman" pitchFamily="34" charset="0"/>
+                <a:ea typeface="Times New Roman" pitchFamily="34" charset="-122"/>
+                <a:cs typeface="Times New Roman" pitchFamily="34" charset="-120"/>
+              </a:rPr>
+              <a:t>2. General Factors of Weathering</a:t>
+            </a:r>
+            <a:endParaRPr lang="en-US" sz="3600" dirty="0"/>
+          </a:p>
+        </p:txBody>
+      </p:sp>
+      <p:sp>
+        <p:nvSpPr>
+          <p:cNvPr id="4" name="Text 2"/>
+          <p:cNvSpPr/>
+          <p:nvPr/>
+        </p:nvSpPr>
+        <p:spPr>
+          <a:xfrm>
+            <a:off x="365760" y="1783080"/>
+            <a:ext cx="4846320" cy="4617720"/>
+          </a:xfrm>
+          <a:prstGeom prst="rect">
+            <a:avLst/>
+          </a:prstGeom>
+          <a:noFill/>
+          <a:ln/>
+        </p:spPr>
+        <p:txBody>
+          <a:bodyPr wrap="square" lIns="0" tIns="0" rIns="0" bIns="0" rtlCol="0" anchor="t"/>
+          <a:lstStyle/>
+          <a:p>
+            <a:pPr algn="l" indent="0" marL="0">
+              <a:spcAft>
+                <a:spcPts val="800"/>
+              </a:spcAft>
+              <a:buNone/>
+            </a:pPr>
+            <a:r>
+              <a:rPr lang="en-US" sz="3600" b="1" dirty="0">
+                <a:solidFill>
+                  <a:srgbClr val="111111"/>
+                </a:solidFill>
+                <a:latin typeface="Times New Roman" pitchFamily="34" charset="0"/>
+                <a:ea typeface="Times New Roman" pitchFamily="34" charset="-122"/>
+                <a:cs typeface="Times New Roman" pitchFamily="34" charset="-120"/>
+              </a:rPr>
+              <a:t>Vegetation: </a:t>
+            </a:r>
+            <a:pPr algn="l" indent="0" marL="0">
+              <a:spcAft>
+                <a:spcPts val="800"/>
+              </a:spcAft>
+              <a:buNone/>
+            </a:pPr>
+            <a:r>
+              <a:rPr lang="en-US" sz="3600" dirty="0">
+                <a:solidFill>
+                  <a:srgbClr val="111111"/>
+                </a:solidFill>
+                <a:latin typeface="Times New Roman" pitchFamily="34" charset="0"/>
+                <a:ea typeface="Times New Roman" pitchFamily="34" charset="-122"/>
+                <a:cs typeface="Times New Roman" pitchFamily="34" charset="-120"/>
+              </a:rPr>
+              <a:t>Roots open cracks, and rotting plants produce acids that attack rocks.</a:t>
+            </a:r>
+            <a:endParaRPr lang="en-US" sz="3600" dirty="0"/>
           </a:p>
         </p:txBody>
       </p:sp>
       <p:pic>
         <p:nvPicPr>
-          <p:cNvPr id="3" name="Image 0" descr="/home/claude/f4/img/minesec_sheet.png">    </p:cNvPr>
+          <p:cNvPr id="5" name="Image 0" descr="/home/claude/f4/img/v2/f4_roots.jpg">    </p:cNvPr>
           <p:cNvPicPr>
             <a:picLocks noChangeAspect="1"/>
           </p:cNvPicPr>
@@ -12645,8 +12875,8 @@
         </p:blipFill>
         <p:spPr>
           <a:xfrm>
-            <a:off x="0" y="658368"/>
-            <a:ext cx="5120640" cy="5833872"/>
+            <a:off x="5349240" y="2071212"/>
+            <a:ext cx="6659575" cy="3693983"/>
           </a:xfrm>
           <a:prstGeom prst="rect">
             <a:avLst/>
@@ -12655,14 +12885,14 @@
       </p:pic>
       <p:sp>
         <p:nvSpPr>
-          <p:cNvPr id="4" name="Text 1"/>
+          <p:cNvPr id="6" name="Text 3"/>
           <p:cNvSpPr/>
           <p:nvPr/>
         </p:nvSpPr>
         <p:spPr>
           <a:xfrm>
-            <a:off x="5349240" y="1005840"/>
-            <a:ext cx="6522415" cy="731520"/>
+            <a:off x="5349240" y="6089904"/>
+            <a:ext cx="6659575" cy="347472"/>
           </a:xfrm>
           <a:prstGeom prst="rect">
             <a:avLst/>
@@ -12671,68 +12901,24 @@
           <a:ln/>
         </p:spPr>
         <p:txBody>
-          <a:bodyPr wrap="square" lIns="0" tIns="0" rIns="0" bIns="0" rtlCol="0" anchor="ctr">
-            <a:normAutofit/>
-          </a:bodyPr>
+          <a:bodyPr wrap="square" lIns="0" tIns="0" rIns="0" bIns="0" rtlCol="0" anchor="ctr"/>
           <a:lstStyle/>
           <a:p>
             <a:pPr algn="ctr" indent="0" marL="0">
               <a:buNone/>
             </a:pPr>
             <a:r>
-              <a:rPr lang="en-US" sz="3600" b="1" dirty="0">
-                <a:solidFill>
-                  <a:srgbClr val="990011"/>
+              <a:rPr lang="en-US" sz="1600" i="1" dirty="0">
+                <a:solidFill>
+                  <a:srgbClr val="555555"/>
                 </a:solidFill>
                 <a:latin typeface="Times New Roman" pitchFamily="34" charset="0"/>
                 <a:ea typeface="Times New Roman" pitchFamily="34" charset="-122"/>
                 <a:cs typeface="Times New Roman" pitchFamily="34" charset="-120"/>
               </a:rPr>
-              <a:t>Evaluation 1</a:t>
-            </a:r>
-            <a:endParaRPr lang="en-US" sz="3600" dirty="0"/>
-          </a:p>
-        </p:txBody>
-      </p:sp>
-      <p:sp>
-        <p:nvSpPr>
-          <p:cNvPr id="5" name="Text 2"/>
-          <p:cNvSpPr/>
-          <p:nvPr/>
-        </p:nvSpPr>
-        <p:spPr>
-          <a:xfrm>
-            <a:off x="5349240" y="1783080"/>
-            <a:ext cx="6522415" cy="4663440"/>
-          </a:xfrm>
-          <a:prstGeom prst="rect">
-            <a:avLst/>
-          </a:prstGeom>
-          <a:noFill/>
-          <a:ln/>
-        </p:spPr>
-        <p:txBody>
-          <a:bodyPr wrap="square" lIns="0" tIns="0" rIns="0" bIns="0" rtlCol="0" anchor="t"/>
-          <a:lstStyle/>
-          <a:p>
-            <a:pPr algn="l" indent="0" marL="0">
-              <a:spcAft>
-                <a:spcPts val="800"/>
-              </a:spcAft>
-              <a:buNone/>
-            </a:pPr>
-            <a:r>
-              <a:rPr lang="en-US" sz="4000" dirty="0">
-                <a:solidFill>
-                  <a:srgbClr val="111111"/>
-                </a:solidFill>
-                <a:latin typeface="Times New Roman" pitchFamily="34" charset="0"/>
-                <a:ea typeface="Times New Roman" pitchFamily="34" charset="-122"/>
-                <a:cs typeface="Times New Roman" pitchFamily="34" charset="-120"/>
-              </a:rPr>
-              <a:t>What is weathering?</a:t>
-            </a:r>
-            <a:endParaRPr lang="en-US" sz="4000" dirty="0"/>
+              <a:t>Illustration: roots in a rock</a:t>
+            </a:r>
+            <a:endParaRPr lang="en-US" sz="1600" dirty="0"/>
           </a:p>
         </p:txBody>
       </p:sp>
@@ -12842,7 +13028,7 @@
                 <a:ea typeface="Calibri" pitchFamily="34" charset="-122"/>
                 <a:cs typeface="Calibri" pitchFamily="34" charset="-120"/>
               </a:rPr>
-              <a:t>FORMATIVE EVALUATION</a:t>
+              <a:t>BOARD SUMMARY</a:t>
             </a:r>
             <a:endParaRPr lang="en-US" sz="1400" dirty="0"/>
           </a:p>
@@ -12907,7 +13093,7 @@
                 <a:ea typeface="Times New Roman" pitchFamily="34" charset="-122"/>
                 <a:cs typeface="Times New Roman" pitchFamily="34" charset="-120"/>
               </a:rPr>
-              <a:t>Expected Answer</a:t>
+              <a:t>2. General Factors of Weathering</a:t>
             </a:r>
             <a:endParaRPr lang="en-US" sz="3600" dirty="0"/>
           </a:p>
@@ -12941,7 +13127,7 @@
               <a:buNone/>
             </a:pPr>
             <a:r>
-              <a:rPr lang="en-US" sz="4000" dirty="0">
+              <a:rPr lang="en-US" sz="4000" b="1" dirty="0">
                 <a:solidFill>
                   <a:srgbClr val="111111"/>
                 </a:solidFill>
@@ -12949,7 +13135,61 @@
                 <a:ea typeface="Times New Roman" pitchFamily="34" charset="-122"/>
                 <a:cs typeface="Times New Roman" pitchFamily="34" charset="-120"/>
               </a:rPr>
-              <a:t>The breaking down of rocks in their place.</a:t>
+              <a:t>Time: </a:t>
+            </a:r>
+            <a:pPr algn="l" indent="0" marL="0">
+              <a:spcAft>
+                <a:spcPts val="800"/>
+              </a:spcAft>
+              <a:buNone/>
+            </a:pPr>
+            <a:r>
+              <a:rPr lang="en-US" sz="4000" dirty="0">
+                <a:solidFill>
+                  <a:srgbClr val="111111"/>
+                </a:solidFill>
+                <a:latin typeface="Times New Roman" pitchFamily="34" charset="0"/>
+                <a:ea typeface="Times New Roman" pitchFamily="34" charset="-122"/>
+                <a:cs typeface="Times New Roman" pitchFamily="34" charset="-120"/>
+              </a:rPr>
+              <a:t>The longer rocks are exposed, the more they are weathered.</a:t>
+            </a:r>
+            <a:endParaRPr lang="en-US" sz="4000" dirty="0"/>
+          </a:p>
+          <a:p>
+            <a:pPr algn="l" indent="0" marL="0">
+              <a:spcAft>
+                <a:spcPts val="800"/>
+              </a:spcAft>
+              <a:buNone/>
+            </a:pPr>
+            <a:r>
+              <a:rPr lang="en-US" sz="4000" b="1" dirty="0">
+                <a:solidFill>
+                  <a:srgbClr val="111111"/>
+                </a:solidFill>
+                <a:latin typeface="Times New Roman" pitchFamily="34" charset="0"/>
+                <a:ea typeface="Times New Roman" pitchFamily="34" charset="-122"/>
+                <a:cs typeface="Times New Roman" pitchFamily="34" charset="-120"/>
+              </a:rPr>
+              <a:t>Human activities: </a:t>
+            </a:r>
+            <a:pPr algn="l" indent="0" marL="0">
+              <a:spcAft>
+                <a:spcPts val="800"/>
+              </a:spcAft>
+              <a:buNone/>
+            </a:pPr>
+            <a:r>
+              <a:rPr lang="en-US" sz="4000" dirty="0">
+                <a:solidFill>
+                  <a:srgbClr val="111111"/>
+                </a:solidFill>
+                <a:latin typeface="Times New Roman" pitchFamily="34" charset="0"/>
+                <a:ea typeface="Times New Roman" pitchFamily="34" charset="-122"/>
+                <a:cs typeface="Times New Roman" pitchFamily="34" charset="-120"/>
+              </a:rPr>
+              <a:t>Roads, quarries, mining and farming expose rocks to weathering.</a:t>
             </a:r>
             <a:endParaRPr lang="en-US" sz="4000" dirty="0"/>
           </a:p>
@@ -13126,7 +13366,7 @@
                 <a:ea typeface="Times New Roman" pitchFamily="34" charset="-122"/>
                 <a:cs typeface="Times New Roman" pitchFamily="34" charset="-120"/>
               </a:rPr>
-              <a:t>Evaluation 2</a:t>
+              <a:t>Evaluation 1</a:t>
             </a:r>
             <a:endParaRPr lang="en-US" sz="3600" dirty="0"/>
           </a:p>
@@ -13168,7 +13408,7 @@
                 <a:ea typeface="Times New Roman" pitchFamily="34" charset="-122"/>
                 <a:cs typeface="Times New Roman" pitchFamily="34" charset="-120"/>
               </a:rPr>
-              <a:t>Give the two types of weathering.</a:t>
+              <a:t>What is weathering?</a:t>
             </a:r>
             <a:endParaRPr lang="en-US" sz="4000" dirty="0"/>
           </a:p>
@@ -13387,7 +13627,7 @@
                 <a:ea typeface="Times New Roman" pitchFamily="34" charset="-122"/>
                 <a:cs typeface="Times New Roman" pitchFamily="34" charset="-120"/>
               </a:rPr>
-              <a:t>Physical and chemical weathering.</a:t>
+              <a:t>The breaking down of rocks in their place.</a:t>
             </a:r>
             <a:endParaRPr lang="en-US" sz="4000" dirty="0"/>
           </a:p>
@@ -13499,7 +13739,7 @@
                 <a:ea typeface="Calibri" pitchFamily="34" charset="-122"/>
                 <a:cs typeface="Calibri" pitchFamily="34" charset="-120"/>
               </a:rPr>
-              <a:t>REMEDIATION</a:t>
+              <a:t>FORMATIVE EVALUATION</a:t>
             </a:r>
             <a:endParaRPr lang="en-US" sz="1400" dirty="0"/>
           </a:p>
@@ -13522,7 +13762,7 @@
         <p:spPr>
           <a:xfrm>
             <a:off x="0" y="658368"/>
-            <a:ext cx="2468880" cy="5833872"/>
+            <a:ext cx="5120640" cy="5833872"/>
           </a:xfrm>
           <a:prstGeom prst="rect">
             <a:avLst/>
@@ -13537,8 +13777,8 @@
         </p:nvSpPr>
         <p:spPr>
           <a:xfrm>
-            <a:off x="2697480" y="1005840"/>
-            <a:ext cx="9174175" cy="731520"/>
+            <a:off x="5349240" y="1005840"/>
+            <a:ext cx="6522415" cy="731520"/>
           </a:xfrm>
           <a:prstGeom prst="rect">
             <a:avLst/>
@@ -13564,7 +13804,7 @@
                 <a:ea typeface="Times New Roman" pitchFamily="34" charset="-122"/>
                 <a:cs typeface="Times New Roman" pitchFamily="34" charset="-120"/>
               </a:rPr>
-              <a:t>Remediation</a:t>
+              <a:t>Evaluation 2</a:t>
             </a:r>
             <a:endParaRPr lang="en-US" sz="3600" dirty="0"/>
           </a:p>
@@ -13578,8 +13818,8 @@
         </p:nvSpPr>
         <p:spPr>
           <a:xfrm>
-            <a:off x="2697480" y="1783080"/>
-            <a:ext cx="9174175" cy="4663440"/>
+            <a:off x="5349240" y="1783080"/>
+            <a:ext cx="6522415" cy="4663440"/>
           </a:xfrm>
           <a:prstGeom prst="rect">
             <a:avLst/>
@@ -13598,7 +13838,7 @@
               <a:buNone/>
             </a:pPr>
             <a:r>
-              <a:rPr lang="en-US" sz="4000" b="1" dirty="0">
+              <a:rPr lang="en-US" sz="4000" dirty="0">
                 <a:solidFill>
                   <a:srgbClr val="111111"/>
                 </a:solidFill>
@@ -13606,73 +13846,7 @@
                 <a:ea typeface="Times New Roman" pitchFamily="34" charset="-122"/>
                 <a:cs typeface="Times New Roman" pitchFamily="34" charset="-120"/>
               </a:rPr>
-              <a:t>Fill in the blanks:</a:t>
-            </a:r>
-            <a:endParaRPr lang="en-US" sz="4000" dirty="0"/>
-          </a:p>
-          <a:p>
-            <a:pPr algn="l" marL="342900" indent="-342900">
-              <a:spcAft>
-                <a:spcPts val="800"/>
-              </a:spcAft>
-              <a:buSzPct val="100000"/>
-              <a:buFont typeface="+mj-lt"/>
-              <a:buAutoNum type="arabicPeriod" startAt="1"/>
-            </a:pPr>
-            <a:r>
-              <a:rPr lang="en-US" sz="4000" dirty="0">
-                <a:solidFill>
-                  <a:srgbClr val="111111"/>
-                </a:solidFill>
-                <a:latin typeface="Times New Roman" pitchFamily="34" charset="0"/>
-                <a:ea typeface="Times New Roman" pitchFamily="34" charset="-122"/>
-                <a:cs typeface="Times New Roman" pitchFamily="34" charset="-120"/>
-              </a:rPr>
-              <a:t>Rocks breaking into pieces without changing is ______ weathering.</a:t>
-            </a:r>
-            <a:endParaRPr lang="en-US" sz="4000" dirty="0"/>
-          </a:p>
-          <a:p>
-            <a:pPr algn="l" marL="342900" indent="-342900">
-              <a:spcAft>
-                <a:spcPts val="800"/>
-              </a:spcAft>
-              <a:buSzPct val="100000"/>
-              <a:buFont typeface="+mj-lt"/>
-              <a:buAutoNum type="arabicPeriod" startAt="1"/>
-            </a:pPr>
-            <a:r>
-              <a:rPr lang="en-US" sz="4000" dirty="0">
-                <a:solidFill>
-                  <a:srgbClr val="111111"/>
-                </a:solidFill>
-                <a:latin typeface="Times New Roman" pitchFamily="34" charset="0"/>
-                <a:ea typeface="Times New Roman" pitchFamily="34" charset="-122"/>
-                <a:cs typeface="Times New Roman" pitchFamily="34" charset="-120"/>
-              </a:rPr>
-              <a:t>Rain and air change the minerals: ______ weathering.</a:t>
-            </a:r>
-            <a:endParaRPr lang="en-US" sz="4000" dirty="0"/>
-          </a:p>
-          <a:p>
-            <a:pPr algn="l" marL="342900" indent="-342900">
-              <a:spcAft>
-                <a:spcPts val="800"/>
-              </a:spcAft>
-              <a:buSzPct val="100000"/>
-              <a:buFont typeface="+mj-lt"/>
-              <a:buAutoNum type="arabicPeriod" startAt="1"/>
-            </a:pPr>
-            <a:r>
-              <a:rPr lang="en-US" sz="4000" dirty="0">
-                <a:solidFill>
-                  <a:srgbClr val="111111"/>
-                </a:solidFill>
-                <a:latin typeface="Times New Roman" pitchFamily="34" charset="0"/>
-                <a:ea typeface="Times New Roman" pitchFamily="34" charset="-122"/>
-                <a:cs typeface="Times New Roman" pitchFamily="34" charset="-120"/>
-              </a:rPr>
-              <a:t>Tree ______ can break rocks.</a:t>
+              <a:t>Give the two types of weathering.</a:t>
             </a:r>
             <a:endParaRPr lang="en-US" sz="4000" dirty="0"/>
           </a:p>
@@ -13784,7 +13958,7 @@
                 <a:ea typeface="Calibri" pitchFamily="34" charset="-122"/>
                 <a:cs typeface="Calibri" pitchFamily="34" charset="-120"/>
               </a:rPr>
-              <a:t>HOMEWORK</a:t>
+              <a:t>FORMATIVE EVALUATION</a:t>
             </a:r>
             <a:endParaRPr lang="en-US" sz="1400" dirty="0"/>
           </a:p>
@@ -13849,7 +14023,7 @@
                 <a:ea typeface="Times New Roman" pitchFamily="34" charset="-122"/>
                 <a:cs typeface="Times New Roman" pitchFamily="34" charset="-120"/>
               </a:rPr>
-              <a:t>Homework</a:t>
+              <a:t>Expected Answer</a:t>
             </a:r>
             <a:endParaRPr lang="en-US" sz="3600" dirty="0"/>
           </a:p>
@@ -13891,7 +14065,7 @@
                 <a:ea typeface="Times New Roman" pitchFamily="34" charset="-122"/>
                 <a:cs typeface="Times New Roman" pitchFamily="34" charset="-120"/>
               </a:rPr>
-              <a:t>Touch a big rock or a cement wall at 1 p.m. and again at 7 p.m. Write what you feel, and why this could break the rock after many years.</a:t>
+              <a:t>Physical and chemical weathering.</a:t>
             </a:r>
             <a:endParaRPr lang="en-US" sz="4000" dirty="0"/>
           </a:p>
@@ -14003,7 +14177,7 @@
                 <a:ea typeface="Calibri" pitchFamily="34" charset="-122"/>
                 <a:cs typeface="Calibri" pitchFamily="34" charset="-120"/>
               </a:rPr>
-              <a:t>NEXT LESSON</a:t>
+              <a:t>REMEDIATION</a:t>
             </a:r>
             <a:endParaRPr lang="en-US" sz="1400" dirty="0"/>
           </a:p>
@@ -14026,7 +14200,7 @@
         <p:spPr>
           <a:xfrm>
             <a:off x="0" y="658368"/>
-            <a:ext cx="5120640" cy="5833872"/>
+            <a:ext cx="2468880" cy="5833872"/>
           </a:xfrm>
           <a:prstGeom prst="rect">
             <a:avLst/>
@@ -14041,8 +14215,8 @@
         </p:nvSpPr>
         <p:spPr>
           <a:xfrm>
-            <a:off x="5349240" y="1005840"/>
-            <a:ext cx="6522415" cy="731520"/>
+            <a:off x="2697480" y="1005840"/>
+            <a:ext cx="9174175" cy="731520"/>
           </a:xfrm>
           <a:prstGeom prst="rect">
             <a:avLst/>
@@ -14068,7 +14242,7 @@
                 <a:ea typeface="Times New Roman" pitchFamily="34" charset="-122"/>
                 <a:cs typeface="Times New Roman" pitchFamily="34" charset="-120"/>
               </a:rPr>
-              <a:t>Next Lesson</a:t>
+              <a:t>Remediation</a:t>
             </a:r>
             <a:endParaRPr lang="en-US" sz="3600" dirty="0"/>
           </a:p>
@@ -14082,8 +14256,8 @@
         </p:nvSpPr>
         <p:spPr>
           <a:xfrm>
-            <a:off x="5349240" y="1783080"/>
-            <a:ext cx="6522415" cy="4663440"/>
+            <a:off x="2697480" y="1783080"/>
+            <a:ext cx="9174175" cy="4663440"/>
           </a:xfrm>
           <a:prstGeom prst="rect">
             <a:avLst/>
@@ -14092,10 +14266,10 @@
           <a:ln/>
         </p:spPr>
         <p:txBody>
-          <a:bodyPr wrap="square" lIns="0" tIns="0" rIns="0" bIns="0" rtlCol="0" anchor="ctr"/>
-          <a:lstStyle/>
-          <a:p>
-            <a:pPr algn="ctr" indent="0" marL="0">
+          <a:bodyPr wrap="square" lIns="0" tIns="0" rIns="0" bIns="0" rtlCol="0" anchor="t"/>
+          <a:lstStyle/>
+          <a:p>
+            <a:pPr algn="l" indent="0" marL="0">
               <a:spcAft>
                 <a:spcPts val="800"/>
               </a:spcAft>
@@ -14110,27 +14284,73 @@
                 <a:ea typeface="Times New Roman" pitchFamily="34" charset="-122"/>
                 <a:cs typeface="Times New Roman" pitchFamily="34" charset="-120"/>
               </a:rPr>
-              <a:t>Our next lesson will be on:</a:t>
+              <a:t>Fill in the blanks:</a:t>
             </a:r>
             <a:endParaRPr lang="en-US" sz="4000" dirty="0"/>
           </a:p>
           <a:p>
-            <a:pPr algn="ctr" indent="0" marL="0">
+            <a:pPr algn="l" marL="342900" indent="-342900">
               <a:spcAft>
                 <a:spcPts val="800"/>
               </a:spcAft>
-              <a:buNone/>
+              <a:buSzPct val="100000"/>
+              <a:buFont typeface="+mj-lt"/>
+              <a:buAutoNum type="arabicPeriod" startAt="1"/>
             </a:pPr>
             <a:r>
-              <a:rPr lang="en-US" sz="4000" b="1" dirty="0">
-                <a:solidFill>
-                  <a:srgbClr val="990011"/>
+              <a:rPr lang="en-US" sz="4000" dirty="0">
+                <a:solidFill>
+                  <a:srgbClr val="111111"/>
                 </a:solidFill>
                 <a:latin typeface="Times New Roman" pitchFamily="34" charset="0"/>
                 <a:ea typeface="Times New Roman" pitchFamily="34" charset="-122"/>
                 <a:cs typeface="Times New Roman" pitchFamily="34" charset="-120"/>
               </a:rPr>
-              <a:t>Lesson 16: Physical Weathering Processes and Products</a:t>
+              <a:t>Rocks breaking into pieces without changing is ______ weathering.</a:t>
+            </a:r>
+            <a:endParaRPr lang="en-US" sz="4000" dirty="0"/>
+          </a:p>
+          <a:p>
+            <a:pPr algn="l" marL="342900" indent="-342900">
+              <a:spcAft>
+                <a:spcPts val="800"/>
+              </a:spcAft>
+              <a:buSzPct val="100000"/>
+              <a:buFont typeface="+mj-lt"/>
+              <a:buAutoNum type="arabicPeriod" startAt="1"/>
+            </a:pPr>
+            <a:r>
+              <a:rPr lang="en-US" sz="4000" dirty="0">
+                <a:solidFill>
+                  <a:srgbClr val="111111"/>
+                </a:solidFill>
+                <a:latin typeface="Times New Roman" pitchFamily="34" charset="0"/>
+                <a:ea typeface="Times New Roman" pitchFamily="34" charset="-122"/>
+                <a:cs typeface="Times New Roman" pitchFamily="34" charset="-120"/>
+              </a:rPr>
+              <a:t>Rain and air change the minerals: ______ weathering.</a:t>
+            </a:r>
+            <a:endParaRPr lang="en-US" sz="4000" dirty="0"/>
+          </a:p>
+          <a:p>
+            <a:pPr algn="l" marL="342900" indent="-342900">
+              <a:spcAft>
+                <a:spcPts val="800"/>
+              </a:spcAft>
+              <a:buSzPct val="100000"/>
+              <a:buFont typeface="+mj-lt"/>
+              <a:buAutoNum type="arabicPeriod" startAt="1"/>
+            </a:pPr>
+            <a:r>
+              <a:rPr lang="en-US" sz="4000" dirty="0">
+                <a:solidFill>
+                  <a:srgbClr val="111111"/>
+                </a:solidFill>
+                <a:latin typeface="Times New Roman" pitchFamily="34" charset="0"/>
+                <a:ea typeface="Times New Roman" pitchFamily="34" charset="-122"/>
+                <a:cs typeface="Times New Roman" pitchFamily="34" charset="-120"/>
+              </a:rPr>
+              <a:t>Tree ______ can break rocks.</a:t>
             </a:r>
             <a:endParaRPr lang="en-US" sz="4000" dirty="0"/>
           </a:p>
@@ -14481,6 +14701,464 @@
                 <a:ea typeface="Calibri" pitchFamily="34" charset="-122"/>
                 <a:cs typeface="Calibri" pitchFamily="34" charset="-120"/>
               </a:rPr>
+              <a:t>HOMEWORK</a:t>
+            </a:r>
+            <a:endParaRPr lang="en-US" sz="1400" dirty="0"/>
+          </a:p>
+        </p:txBody>
+      </p:sp>
+      <p:pic>
+        <p:nvPicPr>
+          <p:cNvPr id="3" name="Image 0" descr="/home/claude/f4/img/minesec_sheet.png">    </p:cNvPr>
+          <p:cNvPicPr>
+            <a:picLocks noChangeAspect="1"/>
+          </p:cNvPicPr>
+          <p:nvPr/>
+        </p:nvPicPr>
+        <p:blipFill>
+          <a:blip r:embed="rId1"/>
+          <a:stretch>
+            <a:fillRect/>
+          </a:stretch>
+        </p:blipFill>
+        <p:spPr>
+          <a:xfrm>
+            <a:off x="0" y="658368"/>
+            <a:ext cx="5120640" cy="5833872"/>
+          </a:xfrm>
+          <a:prstGeom prst="rect">
+            <a:avLst/>
+          </a:prstGeom>
+        </p:spPr>
+      </p:pic>
+      <p:sp>
+        <p:nvSpPr>
+          <p:cNvPr id="4" name="Text 1"/>
+          <p:cNvSpPr/>
+          <p:nvPr/>
+        </p:nvSpPr>
+        <p:spPr>
+          <a:xfrm>
+            <a:off x="5349240" y="1005840"/>
+            <a:ext cx="6522415" cy="731520"/>
+          </a:xfrm>
+          <a:prstGeom prst="rect">
+            <a:avLst/>
+          </a:prstGeom>
+          <a:noFill/>
+          <a:ln/>
+        </p:spPr>
+        <p:txBody>
+          <a:bodyPr wrap="square" lIns="0" tIns="0" rIns="0" bIns="0" rtlCol="0" anchor="ctr">
+            <a:normAutofit/>
+          </a:bodyPr>
+          <a:lstStyle/>
+          <a:p>
+            <a:pPr algn="ctr" indent="0" marL="0">
+              <a:buNone/>
+            </a:pPr>
+            <a:r>
+              <a:rPr lang="en-US" sz="3600" b="1" dirty="0">
+                <a:solidFill>
+                  <a:srgbClr val="990011"/>
+                </a:solidFill>
+                <a:latin typeface="Times New Roman" pitchFamily="34" charset="0"/>
+                <a:ea typeface="Times New Roman" pitchFamily="34" charset="-122"/>
+                <a:cs typeface="Times New Roman" pitchFamily="34" charset="-120"/>
+              </a:rPr>
+              <a:t>Homework</a:t>
+            </a:r>
+            <a:endParaRPr lang="en-US" sz="3600" dirty="0"/>
+          </a:p>
+        </p:txBody>
+      </p:sp>
+      <p:sp>
+        <p:nvSpPr>
+          <p:cNvPr id="5" name="Text 2"/>
+          <p:cNvSpPr/>
+          <p:nvPr/>
+        </p:nvSpPr>
+        <p:spPr>
+          <a:xfrm>
+            <a:off x="5349240" y="1783080"/>
+            <a:ext cx="6522415" cy="4663440"/>
+          </a:xfrm>
+          <a:prstGeom prst="rect">
+            <a:avLst/>
+          </a:prstGeom>
+          <a:noFill/>
+          <a:ln/>
+        </p:spPr>
+        <p:txBody>
+          <a:bodyPr wrap="square" lIns="0" tIns="0" rIns="0" bIns="0" rtlCol="0" anchor="t"/>
+          <a:lstStyle/>
+          <a:p>
+            <a:pPr algn="l" indent="0" marL="0">
+              <a:spcAft>
+                <a:spcPts val="800"/>
+              </a:spcAft>
+              <a:buNone/>
+            </a:pPr>
+            <a:r>
+              <a:rPr lang="en-US" sz="4000" dirty="0">
+                <a:solidFill>
+                  <a:srgbClr val="111111"/>
+                </a:solidFill>
+                <a:latin typeface="Times New Roman" pitchFamily="34" charset="0"/>
+                <a:ea typeface="Times New Roman" pitchFamily="34" charset="-122"/>
+                <a:cs typeface="Times New Roman" pitchFamily="34" charset="-120"/>
+              </a:rPr>
+              <a:t>Touch a big rock or a cement wall at 1 p.m. and again at 7 p.m. Write what you feel, and why this could break the rock after many years.</a:t>
+            </a:r>
+            <a:endParaRPr lang="en-US" sz="4000" dirty="0"/>
+          </a:p>
+        </p:txBody>
+      </p:sp>
+      <p:sp>
+        <p:nvSpPr>
+          <p:cNvPr id="25" name="Slide Number Placeholder 0"/>
+          <p:cNvSpPr>
+            <a:spLocks noGrp="1"/>
+          </p:cNvSpPr>
+          <p:nvPr>
+            <p:ph type="sldNum" sz="quarter" idx="4294967295"/>
+          </p:nvPr>
+        </p:nvSpPr>
+        <p:spPr>
+          <a:xfrm>
+            <a:off x="27432" y="91440"/>
+            <a:ext cx="585216" cy="475488"/>
+          </a:xfrm>
+          <a:prstGeom prst="rect">
+            <a:avLst/>
+          </a:prstGeom>
+          <a:extLst>
+            <a:ext uri="{C572A759-6A51-4108-AA02-DFA0A04FC94B}">
+              <ma14:wrappingTextBoxFlag xmlns:ma14="http://schemas.microsoft.com/office/mac/drawingml/2011/main" val="0"/>
+            </a:ext>
+          </a:extLst>
+        </p:spPr>
+        <p:txBody>
+          <a:bodyPr/>
+          <a:lstStyle>
+            <a:lvl1pPr>
+              <a:defRPr sz="2000">
+                <a:solidFill>
+                  <a:srgbClr val="FFFFFF"/>
+                </a:solidFill>
+                <a:latin typeface="Calibri"/>
+                <a:ea typeface="Calibri"/>
+                <a:cs typeface="Calibri"/>
+              </a:defRPr>
+            </a:lvl1pPr>
+          </a:lstStyle>
+          <a:p>
+            <a:pPr algn="ctr"/>
+            <a:fld id="{F7021451-1387-4CA6-816F-3879F97B5CBC}" type="slidenum">
+              <a:rPr b="1" lang="en-US"/>
+              <a:t>40</a:t>
+            </a:fld>
+            <a:endParaRPr lang="en-US"/>
+          </a:p>
+        </p:txBody>
+      </p:sp>
+    </p:spTree>
+  </p:cSld>
+  <p:clrMapOvr>
+    <a:masterClrMapping/>
+  </p:clrMapOvr>
+</p:sld>
+</file>
+
+<file path=ppt/slides/slide41.xml><?xml version="1.0" encoding="utf-8"?>
+<p:sld xmlns:a="http://schemas.openxmlformats.org/drawingml/2006/main" xmlns:r="http://schemas.openxmlformats.org/officeDocument/2006/relationships" xmlns:p="http://schemas.openxmlformats.org/presentationml/2006/main">
+  <p:cSld name="Slide 41">
+    <p:spTree>
+      <p:nvGrpSpPr>
+        <p:cNvPr id="1" name=""/>
+        <p:cNvGrpSpPr/>
+        <p:nvPr/>
+      </p:nvGrpSpPr>
+      <p:grpSpPr>
+        <a:xfrm>
+          <a:off x="0" y="0"/>
+          <a:ext cx="0" cy="0"/>
+          <a:chOff x="0" y="0"/>
+          <a:chExt cx="0" cy="0"/>
+        </a:xfrm>
+      </p:grpSpPr>
+      <p:sp>
+        <p:nvSpPr>
+          <p:cNvPr id="2" name="Text 0"/>
+          <p:cNvSpPr/>
+          <p:nvPr/>
+        </p:nvSpPr>
+        <p:spPr>
+          <a:xfrm>
+            <a:off x="457200" y="713232"/>
+            <a:ext cx="11368735" cy="274320"/>
+          </a:xfrm>
+          <a:prstGeom prst="rect">
+            <a:avLst/>
+          </a:prstGeom>
+          <a:noFill/>
+          <a:ln/>
+        </p:spPr>
+        <p:txBody>
+          <a:bodyPr wrap="square" lIns="0" tIns="0" rIns="0" bIns="0" rtlCol="0" anchor="ctr"/>
+          <a:lstStyle/>
+          <a:p>
+            <a:pPr algn="r" indent="0" marL="0">
+              <a:buNone/>
+            </a:pPr>
+            <a:r>
+              <a:rPr lang="en-US" sz="1400" b="1" dirty="0">
+                <a:solidFill>
+                  <a:srgbClr val="1C3F6E"/>
+                </a:solidFill>
+                <a:latin typeface="Calibri" pitchFamily="34" charset="0"/>
+                <a:ea typeface="Calibri" pitchFamily="34" charset="-122"/>
+                <a:cs typeface="Calibri" pitchFamily="34" charset="-120"/>
+              </a:rPr>
+              <a:t>NEXT LESSON</a:t>
+            </a:r>
+            <a:endParaRPr lang="en-US" sz="1400" dirty="0"/>
+          </a:p>
+        </p:txBody>
+      </p:sp>
+      <p:pic>
+        <p:nvPicPr>
+          <p:cNvPr id="3" name="Image 0" descr="/home/claude/f4/img/minesec_sheet.png">    </p:cNvPr>
+          <p:cNvPicPr>
+            <a:picLocks noChangeAspect="1"/>
+          </p:cNvPicPr>
+          <p:nvPr/>
+        </p:nvPicPr>
+        <p:blipFill>
+          <a:blip r:embed="rId1"/>
+          <a:stretch>
+            <a:fillRect/>
+          </a:stretch>
+        </p:blipFill>
+        <p:spPr>
+          <a:xfrm>
+            <a:off x="0" y="658368"/>
+            <a:ext cx="5120640" cy="5833872"/>
+          </a:xfrm>
+          <a:prstGeom prst="rect">
+            <a:avLst/>
+          </a:prstGeom>
+        </p:spPr>
+      </p:pic>
+      <p:sp>
+        <p:nvSpPr>
+          <p:cNvPr id="4" name="Text 1"/>
+          <p:cNvSpPr/>
+          <p:nvPr/>
+        </p:nvSpPr>
+        <p:spPr>
+          <a:xfrm>
+            <a:off x="5349240" y="1005840"/>
+            <a:ext cx="6522415" cy="731520"/>
+          </a:xfrm>
+          <a:prstGeom prst="rect">
+            <a:avLst/>
+          </a:prstGeom>
+          <a:noFill/>
+          <a:ln/>
+        </p:spPr>
+        <p:txBody>
+          <a:bodyPr wrap="square" lIns="0" tIns="0" rIns="0" bIns="0" rtlCol="0" anchor="ctr">
+            <a:normAutofit/>
+          </a:bodyPr>
+          <a:lstStyle/>
+          <a:p>
+            <a:pPr algn="ctr" indent="0" marL="0">
+              <a:buNone/>
+            </a:pPr>
+            <a:r>
+              <a:rPr lang="en-US" sz="3600" b="1" dirty="0">
+                <a:solidFill>
+                  <a:srgbClr val="990011"/>
+                </a:solidFill>
+                <a:latin typeface="Times New Roman" pitchFamily="34" charset="0"/>
+                <a:ea typeface="Times New Roman" pitchFamily="34" charset="-122"/>
+                <a:cs typeface="Times New Roman" pitchFamily="34" charset="-120"/>
+              </a:rPr>
+              <a:t>Next Lesson</a:t>
+            </a:r>
+            <a:endParaRPr lang="en-US" sz="3600" dirty="0"/>
+          </a:p>
+        </p:txBody>
+      </p:sp>
+      <p:sp>
+        <p:nvSpPr>
+          <p:cNvPr id="5" name="Text 2"/>
+          <p:cNvSpPr/>
+          <p:nvPr/>
+        </p:nvSpPr>
+        <p:spPr>
+          <a:xfrm>
+            <a:off x="5349240" y="1783080"/>
+            <a:ext cx="6522415" cy="4663440"/>
+          </a:xfrm>
+          <a:prstGeom prst="rect">
+            <a:avLst/>
+          </a:prstGeom>
+          <a:noFill/>
+          <a:ln/>
+        </p:spPr>
+        <p:txBody>
+          <a:bodyPr wrap="square" lIns="0" tIns="0" rIns="0" bIns="0" rtlCol="0" anchor="ctr"/>
+          <a:lstStyle/>
+          <a:p>
+            <a:pPr algn="ctr" indent="0" marL="0">
+              <a:spcAft>
+                <a:spcPts val="800"/>
+              </a:spcAft>
+              <a:buNone/>
+            </a:pPr>
+            <a:r>
+              <a:rPr lang="en-US" sz="4000" b="1" dirty="0">
+                <a:solidFill>
+                  <a:srgbClr val="111111"/>
+                </a:solidFill>
+                <a:latin typeface="Times New Roman" pitchFamily="34" charset="0"/>
+                <a:ea typeface="Times New Roman" pitchFamily="34" charset="-122"/>
+                <a:cs typeface="Times New Roman" pitchFamily="34" charset="-120"/>
+              </a:rPr>
+              <a:t>Our next lesson will be on:</a:t>
+            </a:r>
+            <a:endParaRPr lang="en-US" sz="4000" dirty="0"/>
+          </a:p>
+          <a:p>
+            <a:pPr algn="ctr" indent="0" marL="0">
+              <a:spcAft>
+                <a:spcPts val="800"/>
+              </a:spcAft>
+              <a:buNone/>
+            </a:pPr>
+            <a:r>
+              <a:rPr lang="en-US" sz="4000" b="1" dirty="0">
+                <a:solidFill>
+                  <a:srgbClr val="990011"/>
+                </a:solidFill>
+                <a:latin typeface="Times New Roman" pitchFamily="34" charset="0"/>
+                <a:ea typeface="Times New Roman" pitchFamily="34" charset="-122"/>
+                <a:cs typeface="Times New Roman" pitchFamily="34" charset="-120"/>
+              </a:rPr>
+              <a:t>Lesson 16: Physical Weathering Processes and Products</a:t>
+            </a:r>
+            <a:endParaRPr lang="en-US" sz="4000" dirty="0"/>
+          </a:p>
+        </p:txBody>
+      </p:sp>
+      <p:sp>
+        <p:nvSpPr>
+          <p:cNvPr id="25" name="Slide Number Placeholder 0"/>
+          <p:cNvSpPr>
+            <a:spLocks noGrp="1"/>
+          </p:cNvSpPr>
+          <p:nvPr>
+            <p:ph type="sldNum" sz="quarter" idx="4294967295"/>
+          </p:nvPr>
+        </p:nvSpPr>
+        <p:spPr>
+          <a:xfrm>
+            <a:off x="27432" y="91440"/>
+            <a:ext cx="585216" cy="475488"/>
+          </a:xfrm>
+          <a:prstGeom prst="rect">
+            <a:avLst/>
+          </a:prstGeom>
+          <a:extLst>
+            <a:ext uri="{C572A759-6A51-4108-AA02-DFA0A04FC94B}">
+              <ma14:wrappingTextBoxFlag xmlns:ma14="http://schemas.microsoft.com/office/mac/drawingml/2011/main" val="0"/>
+            </a:ext>
+          </a:extLst>
+        </p:spPr>
+        <p:txBody>
+          <a:bodyPr/>
+          <a:lstStyle>
+            <a:lvl1pPr>
+              <a:defRPr sz="2000">
+                <a:solidFill>
+                  <a:srgbClr val="FFFFFF"/>
+                </a:solidFill>
+                <a:latin typeface="Calibri"/>
+                <a:ea typeface="Calibri"/>
+                <a:cs typeface="Calibri"/>
+              </a:defRPr>
+            </a:lvl1pPr>
+          </a:lstStyle>
+          <a:p>
+            <a:pPr algn="ctr"/>
+            <a:fld id="{F7021451-1387-4CA6-816F-3879F97B5CBC}" type="slidenum">
+              <a:rPr b="1" lang="en-US"/>
+              <a:t>41</a:t>
+            </a:fld>
+            <a:endParaRPr lang="en-US"/>
+          </a:p>
+        </p:txBody>
+      </p:sp>
+    </p:spTree>
+  </p:cSld>
+  <p:clrMapOvr>
+    <a:masterClrMapping/>
+  </p:clrMapOvr>
+</p:sld>
+</file>
+
+<file path=ppt/slides/slide42.xml><?xml version="1.0" encoding="utf-8"?>
+<p:sld xmlns:a="http://schemas.openxmlformats.org/drawingml/2006/main" xmlns:r="http://schemas.openxmlformats.org/officeDocument/2006/relationships" xmlns:p="http://schemas.openxmlformats.org/presentationml/2006/main">
+  <p:cSld name="Slide 42">
+    <p:spTree>
+      <p:nvGrpSpPr>
+        <p:cNvPr id="1" name=""/>
+        <p:cNvGrpSpPr/>
+        <p:nvPr/>
+      </p:nvGrpSpPr>
+      <p:grpSpPr>
+        <a:xfrm>
+          <a:off x="0" y="0"/>
+          <a:ext cx="0" cy="0"/>
+          <a:chOff x="0" y="0"/>
+          <a:chExt cx="0" cy="0"/>
+        </a:xfrm>
+      </p:grpSpPr>
+      <p:sp>
+        <p:nvSpPr>
+          <p:cNvPr id="2" name="Text 0"/>
+          <p:cNvSpPr/>
+          <p:nvPr/>
+        </p:nvSpPr>
+        <p:spPr>
+          <a:xfrm>
+            <a:off x="457200" y="713232"/>
+            <a:ext cx="11368735" cy="274320"/>
+          </a:xfrm>
+          <a:prstGeom prst="rect">
+            <a:avLst/>
+          </a:prstGeom>
+          <a:noFill/>
+          <a:ln/>
+        </p:spPr>
+        <p:txBody>
+          <a:bodyPr wrap="square" lIns="0" tIns="0" rIns="0" bIns="0" rtlCol="0" anchor="ctr"/>
+          <a:lstStyle/>
+          <a:p>
+            <a:pPr algn="r" indent="0" marL="0">
+              <a:buNone/>
+            </a:pPr>
+            <a:r>
+              <a:rPr lang="en-US" sz="1400" b="1" dirty="0">
+                <a:solidFill>
+                  <a:srgbClr val="1C3F6E"/>
+                </a:solidFill>
+                <a:latin typeface="Calibri" pitchFamily="34" charset="0"/>
+                <a:ea typeface="Calibri" pitchFamily="34" charset="-122"/>
+                <a:cs typeface="Calibri" pitchFamily="34" charset="-120"/>
+              </a:rPr>
               <a:t>BILINGUAL GAME</a:t>
             </a:r>
             <a:endParaRPr lang="en-US" sz="1400" dirty="0"/>
@@ -14528,7 +15206,7 @@
       </p:sp>
       <p:graphicFrame>
         <p:nvGraphicFramePr>
-          <p:cNvPr id="41" name="Table 0"/>
+          <p:cNvPr id="43" name="Table 0"/>
           <p:cNvGraphicFramePr>
             <a:graphicFrameLocks noGrp="1"/>
           </p:cNvGraphicFramePr>
@@ -15840,7 +16518,7 @@
             <a:pPr algn="ctr"/>
             <a:fld id="{F7021451-1387-4CA6-816F-3879F97B5CBC}" type="slidenum">
               <a:rPr b="1" lang="en-US"/>
-              <a:t>40</a:t>
+              <a:t>42</a:t>
             </a:fld>
             <a:endParaRPr lang="en-US"/>
           </a:p>
@@ -15854,9 +16532,9 @@
 </p:sld>
 </file>
 
-<file path=ppt/slides/slide41.xml><?xml version="1.0" encoding="utf-8"?>
+<file path=ppt/slides/slide43.xml><?xml version="1.0" encoding="utf-8"?>
 <p:sld xmlns:a="http://schemas.openxmlformats.org/drawingml/2006/main" xmlns:r="http://schemas.openxmlformats.org/officeDocument/2006/relationships" xmlns:p="http://schemas.openxmlformats.org/presentationml/2006/main">
-  <p:cSld name="Slide 41">
+  <p:cSld name="Slide 43">
     <p:spTree>
       <p:nvGrpSpPr>
         <p:cNvPr id="1" name=""/>
@@ -15951,7 +16629,7 @@
       </p:sp>
       <p:graphicFrame>
         <p:nvGraphicFramePr>
-          <p:cNvPr id="42" name="Table 0"/>
+          <p:cNvPr id="44" name="Table 0"/>
           <p:cNvGraphicFramePr>
             <a:graphicFrameLocks noGrp="1"/>
           </p:cNvGraphicFramePr>
@@ -16573,7 +17251,7 @@
             <a:pPr algn="ctr"/>
             <a:fld id="{F7021451-1387-4CA6-816F-3879F97B5CBC}" type="slidenum">
               <a:rPr b="1" lang="en-US"/>
-              <a:t>41</a:t>
+              <a:t>43</a:t>
             </a:fld>
             <a:endParaRPr lang="en-US"/>
           </a:p>
@@ -16587,9 +17265,9 @@
 </p:sld>
 </file>
 
-<file path=ppt/slides/slide42.xml><?xml version="1.0" encoding="utf-8"?>
+<file path=ppt/slides/slide44.xml><?xml version="1.0" encoding="utf-8"?>
 <p:sld xmlns:a="http://schemas.openxmlformats.org/drawingml/2006/main" xmlns:r="http://schemas.openxmlformats.org/officeDocument/2006/relationships" xmlns:p="http://schemas.openxmlformats.org/presentationml/2006/main">
-  <p:cSld name="Slide 42">
+  <p:cSld name="Slide 44">
     <p:spTree>
       <p:nvGrpSpPr>
         <p:cNvPr id="1" name=""/>
@@ -16684,7 +17362,7 @@
       </p:sp>
       <p:graphicFrame>
         <p:nvGraphicFramePr>
-          <p:cNvPr id="43" name="Table 0"/>
+          <p:cNvPr id="45" name="Table 0"/>
           <p:cNvGraphicFramePr>
             <a:graphicFrameLocks noGrp="1"/>
           </p:cNvGraphicFramePr>
@@ -16794,7 +17472,7 @@
                           <a:ea typeface="Calibri" pitchFamily="34" charset="-122"/>
                           <a:cs typeface="Calibri" pitchFamily="34" charset="-120"/>
                         </a:rPr>
-                        <a:t>Meaning of Weathering; Types of Weathering; Factors of Weathering.</a:t>
+                        <a:t>DEFINITIONS; Types of Weathering; General Factors of Weathering.</a:t>
                       </a:r>
                       <a:endParaRPr lang="en-US" sz="1600" dirty="0">
                         <a:latin typeface="Calibri" charset="0"/>
@@ -17444,7 +18122,7 @@
             <a:pPr algn="ctr"/>
             <a:fld id="{F7021451-1387-4CA6-816F-3879F97B5CBC}" type="slidenum">
               <a:rPr b="1" lang="en-US"/>
-              <a:t>42</a:t>
+              <a:t>44</a:t>
             </a:fld>
             <a:endParaRPr lang="en-US"/>
           </a:p>
@@ -17458,9 +18136,9 @@
 </p:sld>
 </file>
 
-<file path=ppt/slides/slide43.xml><?xml version="1.0" encoding="utf-8"?>
+<file path=ppt/slides/slide45.xml><?xml version="1.0" encoding="utf-8"?>
 <p:sld xmlns:a="http://schemas.openxmlformats.org/drawingml/2006/main" xmlns:r="http://schemas.openxmlformats.org/officeDocument/2006/relationships" xmlns:p="http://schemas.openxmlformats.org/presentationml/2006/main">
-  <p:cSld name="Slide 43">
+  <p:cSld name="Slide 45">
     <p:spTree>
       <p:nvGrpSpPr>
         <p:cNvPr id="1" name=""/>
@@ -17679,7 +18357,7 @@
                 <a:ea typeface="Calibri" pitchFamily="34" charset="-122"/>
                 <a:cs typeface="Calibri" pitchFamily="34" charset="-120"/>
               </a:rPr>
-              <a:t>Without the projector (Activity 3): show a tree root in a cracked wall or road.</a:t>
+              <a:t>Without the projector (Activity 3): show a tree root lifting a pavement.</a:t>
             </a:r>
             <a:endParaRPr lang="en-US" sz="2000" dirty="0"/>
           </a:p>
@@ -17727,7 +18405,7 @@
             <a:pPr algn="ctr"/>
             <a:fld id="{F7021451-1387-4CA6-816F-3879F97B5CBC}" type="slidenum">
               <a:rPr b="1" lang="en-US"/>
-              <a:t>43</a:t>
+              <a:t>45</a:t>
             </a:fld>
             <a:endParaRPr lang="en-US"/>
           </a:p>
@@ -17741,9 +18419,9 @@
 </p:sld>
 </file>
 
-<file path=ppt/slides/slide44.xml><?xml version="1.0" encoding="utf-8"?>
+<file path=ppt/slides/slide46.xml><?xml version="1.0" encoding="utf-8"?>
 <p:sld xmlns:a="http://schemas.openxmlformats.org/drawingml/2006/main" xmlns:r="http://schemas.openxmlformats.org/officeDocument/2006/relationships" xmlns:p="http://schemas.openxmlformats.org/presentationml/2006/main">
-  <p:cSld name="Slide 44">
+  <p:cSld name="Slide 46">
     <p:spTree>
       <p:nvGrpSpPr>
         <p:cNvPr id="1" name=""/>
@@ -18052,7 +18730,7 @@
             <a:pPr algn="ctr"/>
             <a:fld id="{F7021451-1387-4CA6-816F-3879F97B5CBC}" type="slidenum">
               <a:rPr b="1" lang="en-US"/>
-              <a:t>44</a:t>
+              <a:t>46</a:t>
             </a:fld>
             <a:endParaRPr lang="en-US"/>
           </a:p>
@@ -19236,7 +19914,7 @@
         <p:spPr>
           <a:xfrm>
             <a:off x="0" y="658368"/>
-            <a:ext cx="5120640" cy="5833872"/>
+            <a:ext cx="2468880" cy="5833872"/>
           </a:xfrm>
           <a:prstGeom prst="rect">
             <a:avLst/>
@@ -19251,8 +19929,8 @@
         </p:nvSpPr>
         <p:spPr>
           <a:xfrm>
-            <a:off x="5349240" y="1005840"/>
-            <a:ext cx="6522415" cy="731520"/>
+            <a:off x="2697480" y="1005840"/>
+            <a:ext cx="9174175" cy="731520"/>
           </a:xfrm>
           <a:prstGeom prst="rect">
             <a:avLst/>
@@ -19292,8 +19970,8 @@
         </p:nvSpPr>
         <p:spPr>
           <a:xfrm>
-            <a:off x="5349240" y="1783080"/>
-            <a:ext cx="6522415" cy="4663440"/>
+            <a:off x="2697480" y="1783080"/>
+            <a:ext cx="9174175" cy="4663440"/>
           </a:xfrm>
           <a:prstGeom prst="rect">
             <a:avLst/>
@@ -19320,7 +19998,7 @@
                 <a:ea typeface="Times New Roman" pitchFamily="34" charset="-122"/>
                 <a:cs typeface="Times New Roman" pitchFamily="34" charset="-120"/>
               </a:rPr>
-              <a:t>In Sadou's compound, an old wall is cracked. Its stones break into sandy pieces at the bottom. A new wall with the same stones still looks strong.</a:t>
+              <a:t>In Sadou's compound, an old wall is cracked, and its stones break into sandy pieces at the bottom, while a new wall built with the same stones still looks strong. Sadou asks: "What slowly breaks the stones of the old wall, and why faster in some places than in others?"</a:t>
             </a:r>
             <a:endParaRPr lang="en-US" sz="4000" dirty="0"/>
           </a:p>

--- a/lecons/F3/18_FORM4_LESSON15_Weathering.pptx
+++ b/lecons/F3/18_FORM4_LESSON15_Weathering.pptx
@@ -3451,7 +3451,7 @@
           <a:p>
             <a:r>
               <a:rPr lang="en-US" dirty="0"/>
-              <a:t>Before we start the new lesson, let us correct the homework I gave you at the end of Lesson 14: Denudation. The question was: Compare an old wall and a new wall in your area. Write three differences you see, and suggest what damaged the old wall. Take out your exercise books.</a:t>
+              <a:t>Before we start the new lesson, let us correct the homework I gave you at the end of Lesson 14: Denudation. The question was: Name the two types of weathering. Take out your exercise books.</a:t>
             </a:r>
             <a:endParaRPr lang="en-US" dirty="0"/>
           </a:p>
@@ -3539,7 +3539,7 @@
           <a:p>
             <a:r>
               <a:rPr lang="en-US" dirty="0"/>
-              <a:t>For your homework: Touch a big rock or a cement wall at 1 p.m. and again at 7 p.m. Write what you feel, and why this could break the rock after many years. We shall correct it at the beginning of our next lesson.</a:t>
+              <a:t>For your homework: Name two processes of physical weathering. We shall correct it at the beginning of our next lesson.</a:t>
             </a:r>
             <a:endParaRPr lang="en-US" dirty="0"/>
           </a:p>
@@ -4155,7 +4155,7 @@
           <a:p>
             <a:r>
               <a:rPr lang="en-US" dirty="0"/>
-              <a:t>Here is a good answer. The old wall has cracks, peeling paint and crumbling or dark patches, while the new wall is smooth and clean. It was damaged by rain, sun and heat, plants and time: this is weathering. Compare it with your own answer and correct your work in red.</a:t>
+              <a:t>Here is a good answer. Physical weathering and chemical weathering. Compare it with your own answer and correct your work in red.</a:t>
             </a:r>
             <a:endParaRPr lang="en-US" dirty="0"/>
           </a:p>
@@ -14589,7 +14589,7 @@
                 <a:ea typeface="Times New Roman" pitchFamily="34" charset="-122"/>
                 <a:cs typeface="Times New Roman" pitchFamily="34" charset="-120"/>
               </a:rPr>
-              <a:t>Compare an old wall and a new wall in your area. Write three differences you see, and suggest what damaged the old wall.</a:t>
+              <a:t>Name the two types of weathering.</a:t>
             </a:r>
             <a:endParaRPr lang="en-US" sz="4000" dirty="0"/>
           </a:p>
@@ -14808,7 +14808,7 @@
                 <a:ea typeface="Times New Roman" pitchFamily="34" charset="-122"/>
                 <a:cs typeface="Times New Roman" pitchFamily="34" charset="-120"/>
               </a:rPr>
-              <a:t>Touch a big rock or a cement wall at 1 p.m. and again at 7 p.m. Write what you feel, and why this could break the rock after many years.</a:t>
+              <a:t>Name two processes of physical weathering.</a:t>
             </a:r>
             <a:endParaRPr lang="en-US" sz="4000" dirty="0"/>
           </a:p>
@@ -17748,7 +17748,7 @@
                           <a:ea typeface="Calibri" pitchFamily="34" charset="-122"/>
                           <a:cs typeface="Calibri" pitchFamily="34" charset="-120"/>
                         </a:rPr>
-                        <a:t>Touch a big rock or a cement wall at 1 p.m. and again at 7 p.m. Write what you feel, and why this could break the rock after many years.</a:t>
+                        <a:t>Name two processes of physical weathering.</a:t>
                       </a:r>
                       <a:endParaRPr lang="en-US" sz="1600" dirty="0">
                         <a:latin typeface="Calibri" charset="0"/>
@@ -18817,7 +18817,7 @@
         <p:spPr>
           <a:xfrm>
             <a:off x="0" y="658368"/>
-            <a:ext cx="3840480" cy="5833872"/>
+            <a:ext cx="5120640" cy="5833872"/>
           </a:xfrm>
           <a:prstGeom prst="rect">
             <a:avLst/>
@@ -18832,8 +18832,8 @@
         </p:nvSpPr>
         <p:spPr>
           <a:xfrm>
-            <a:off x="4069080" y="1005840"/>
-            <a:ext cx="7802575" cy="731520"/>
+            <a:off x="5349240" y="1005840"/>
+            <a:ext cx="6522415" cy="731520"/>
           </a:xfrm>
           <a:prstGeom prst="rect">
             <a:avLst/>
@@ -18873,8 +18873,8 @@
         </p:nvSpPr>
         <p:spPr>
           <a:xfrm>
-            <a:off x="4069080" y="1783080"/>
-            <a:ext cx="7802575" cy="4663440"/>
+            <a:off x="5349240" y="1783080"/>
+            <a:ext cx="6522415" cy="4663440"/>
           </a:xfrm>
           <a:prstGeom prst="rect">
             <a:avLst/>
@@ -18901,7 +18901,7 @@
                 <a:ea typeface="Times New Roman" pitchFamily="34" charset="-122"/>
                 <a:cs typeface="Times New Roman" pitchFamily="34" charset="-120"/>
               </a:rPr>
-              <a:t>The old wall has cracks, peeling paint and crumbling or dark patches, while the new wall is smooth and clean. It was damaged by rain, sun and heat, plants and time: this is weathering.</a:t>
+              <a:t>Physical weathering and chemical weathering.</a:t>
             </a:r>
             <a:endParaRPr lang="en-US" sz="4000" dirty="0"/>
           </a:p>
